--- a/docs/pptx/carbo/ritu-carbo-linsubhr-egfrdisc-grade2.pptx
+++ b/docs/pptx/carbo/ritu-carbo-linsubhr-egfrdisc-grade2.pptx
@@ -2443,7 +2443,7 @@
           </p:nvSpPr>
           <p:spPr>
             <a:xfrm>
-              <a:off x="1810493" y="2073503"/>
+              <a:off x="1813815" y="2073503"/>
               <a:ext cx="0" cy="3649639"/>
             </a:xfrm>
             <a:custGeom>
@@ -2486,7 +2486,7 @@
           </p:nvSpPr>
           <p:spPr>
             <a:xfrm>
-              <a:off x="4291851" y="2073503"/>
+              <a:off x="4291714" y="2073503"/>
               <a:ext cx="0" cy="3649639"/>
             </a:xfrm>
             <a:custGeom>
@@ -2529,7 +2529,7 @@
           </p:nvSpPr>
           <p:spPr>
             <a:xfrm>
-              <a:off x="6773208" y="2073503"/>
+              <a:off x="6769614" y="2073503"/>
               <a:ext cx="0" cy="3649639"/>
             </a:xfrm>
             <a:custGeom>
@@ -2787,7 +2787,7 @@
           </p:nvSpPr>
           <p:spPr>
             <a:xfrm>
-              <a:off x="3051172" y="2073503"/>
+              <a:off x="3052764" y="2073503"/>
               <a:ext cx="0" cy="3649639"/>
             </a:xfrm>
             <a:custGeom>
@@ -2830,7 +2830,7 @@
           </p:nvSpPr>
           <p:spPr>
             <a:xfrm>
-              <a:off x="5532530" y="2073503"/>
+              <a:off x="5530664" y="2073503"/>
               <a:ext cx="0" cy="3649639"/>
             </a:xfrm>
             <a:custGeom>
@@ -2873,7 +2873,7 @@
           </p:nvSpPr>
           <p:spPr>
             <a:xfrm>
-              <a:off x="8013887" y="2073503"/>
+              <a:off x="8008563" y="2073503"/>
               <a:ext cx="0" cy="3649639"/>
             </a:xfrm>
             <a:custGeom>
@@ -2917,569 +2917,563 @@
           <p:spPr>
             <a:xfrm>
               <a:off x="1172049" y="2073503"/>
-              <a:ext cx="7090630" cy="3209948"/>
+              <a:ext cx="7090630" cy="3214698"/>
             </a:xfrm>
             <a:custGeom>
               <a:avLst/>
               <a:pathLst>
-                <a:path w="7090630" h="3209948">
+                <a:path w="7090630" h="3214698">
                   <a:moveTo>
-                    <a:pt x="1065091" y="0"/>
+                    <a:pt x="1162545" y="0"/>
                   </a:moveTo>
                   <a:lnTo>
-                    <a:pt x="1074337" y="13749"/>
-                  </a:lnTo>
-                  <a:lnTo>
-                    <a:pt x="1145960" y="117085"/>
-                  </a:lnTo>
-                  <a:lnTo>
-                    <a:pt x="1217582" y="217344"/>
-                  </a:lnTo>
-                  <a:lnTo>
-                    <a:pt x="1289205" y="314617"/>
-                  </a:lnTo>
-                  <a:lnTo>
-                    <a:pt x="1360827" y="408994"/>
-                  </a:lnTo>
-                  <a:lnTo>
-                    <a:pt x="1432450" y="500560"/>
-                  </a:lnTo>
-                  <a:lnTo>
-                    <a:pt x="1504073" y="589399"/>
-                  </a:lnTo>
-                  <a:lnTo>
-                    <a:pt x="1575695" y="675592"/>
-                  </a:lnTo>
-                  <a:lnTo>
-                    <a:pt x="1647318" y="759219"/>
-                  </a:lnTo>
-                  <a:lnTo>
-                    <a:pt x="1718940" y="840355"/>
-                  </a:lnTo>
-                  <a:lnTo>
-                    <a:pt x="1790563" y="919075"/>
-                  </a:lnTo>
-                  <a:lnTo>
-                    <a:pt x="1862185" y="995451"/>
-                  </a:lnTo>
-                  <a:lnTo>
-                    <a:pt x="1933808" y="1069552"/>
-                  </a:lnTo>
-                  <a:lnTo>
-                    <a:pt x="2005430" y="1141447"/>
-                  </a:lnTo>
-                  <a:lnTo>
-                    <a:pt x="2077053" y="1211200"/>
-                  </a:lnTo>
-                  <a:lnTo>
-                    <a:pt x="2148675" y="1278877"/>
-                  </a:lnTo>
-                  <a:lnTo>
-                    <a:pt x="2220298" y="1344538"/>
-                  </a:lnTo>
-                  <a:lnTo>
-                    <a:pt x="2291920" y="1408243"/>
-                  </a:lnTo>
-                  <a:lnTo>
-                    <a:pt x="2363543" y="1470051"/>
-                  </a:lnTo>
-                  <a:lnTo>
-                    <a:pt x="2435165" y="1530019"/>
-                  </a:lnTo>
-                  <a:lnTo>
-                    <a:pt x="2506788" y="1588201"/>
-                  </a:lnTo>
-                  <a:lnTo>
-                    <a:pt x="2578410" y="1644650"/>
-                  </a:lnTo>
-                  <a:lnTo>
-                    <a:pt x="2650033" y="1699418"/>
-                  </a:lnTo>
-                  <a:lnTo>
-                    <a:pt x="2721655" y="1752556"/>
-                  </a:lnTo>
-                  <a:lnTo>
-                    <a:pt x="2793278" y="1804110"/>
-                  </a:lnTo>
-                  <a:lnTo>
-                    <a:pt x="2864901" y="1854130"/>
-                  </a:lnTo>
-                  <a:lnTo>
-                    <a:pt x="2936523" y="1902660"/>
-                  </a:lnTo>
-                  <a:lnTo>
-                    <a:pt x="3008146" y="1949744"/>
-                  </a:lnTo>
-                  <a:lnTo>
-                    <a:pt x="3079768" y="1995427"/>
-                  </a:lnTo>
-                  <a:lnTo>
-                    <a:pt x="3151391" y="2039749"/>
-                  </a:lnTo>
-                  <a:lnTo>
-                    <a:pt x="3223013" y="2082751"/>
-                  </a:lnTo>
-                  <a:lnTo>
-                    <a:pt x="3294636" y="2124473"/>
-                  </a:lnTo>
-                  <a:lnTo>
-                    <a:pt x="3366258" y="2164952"/>
-                  </a:lnTo>
-                  <a:lnTo>
-                    <a:pt x="3437881" y="2204225"/>
-                  </a:lnTo>
-                  <a:lnTo>
-                    <a:pt x="3509503" y="2242329"/>
-                  </a:lnTo>
-                  <a:lnTo>
-                    <a:pt x="3581126" y="2279299"/>
-                  </a:lnTo>
-                  <a:lnTo>
-                    <a:pt x="3652748" y="2315167"/>
-                  </a:lnTo>
-                  <a:lnTo>
-                    <a:pt x="3724371" y="2349967"/>
-                  </a:lnTo>
-                  <a:lnTo>
-                    <a:pt x="3795993" y="2383731"/>
-                  </a:lnTo>
-                  <a:lnTo>
-                    <a:pt x="3867616" y="2416490"/>
-                  </a:lnTo>
-                  <a:lnTo>
-                    <a:pt x="3939238" y="2448272"/>
-                  </a:lnTo>
-                  <a:lnTo>
-                    <a:pt x="4010861" y="2479109"/>
-                  </a:lnTo>
-                  <a:lnTo>
-                    <a:pt x="4082483" y="2509027"/>
-                  </a:lnTo>
-                  <a:lnTo>
-                    <a:pt x="4154106" y="2538054"/>
-                  </a:lnTo>
-                  <a:lnTo>
-                    <a:pt x="4225729" y="2566217"/>
-                  </a:lnTo>
-                  <a:lnTo>
-                    <a:pt x="4297351" y="2593541"/>
-                  </a:lnTo>
-                  <a:lnTo>
-                    <a:pt x="4368974" y="2620051"/>
-                  </a:lnTo>
-                  <a:lnTo>
-                    <a:pt x="4440596" y="2645772"/>
-                  </a:lnTo>
-                  <a:lnTo>
-                    <a:pt x="4512219" y="2655925"/>
-                  </a:lnTo>
-                  <a:lnTo>
-                    <a:pt x="4583841" y="2658399"/>
-                  </a:lnTo>
-                  <a:lnTo>
-                    <a:pt x="4655464" y="2660865"/>
-                  </a:lnTo>
-                  <a:lnTo>
-                    <a:pt x="4727086" y="2663324"/>
-                  </a:lnTo>
-                  <a:lnTo>
-                    <a:pt x="4798709" y="2665775"/>
-                  </a:lnTo>
-                  <a:lnTo>
-                    <a:pt x="4870331" y="2668219"/>
-                  </a:lnTo>
-                  <a:lnTo>
-                    <a:pt x="4941954" y="2670656"/>
-                  </a:lnTo>
-                  <a:lnTo>
-                    <a:pt x="5013576" y="2673085"/>
-                  </a:lnTo>
-                  <a:lnTo>
-                    <a:pt x="5085199" y="2675508"/>
-                  </a:lnTo>
-                  <a:lnTo>
-                    <a:pt x="5156821" y="2677923"/>
-                  </a:lnTo>
-                  <a:lnTo>
-                    <a:pt x="5228444" y="2680330"/>
-                  </a:lnTo>
-                  <a:lnTo>
-                    <a:pt x="5300066" y="2682731"/>
-                  </a:lnTo>
-                  <a:lnTo>
-                    <a:pt x="5371689" y="2685124"/>
-                  </a:lnTo>
-                  <a:lnTo>
-                    <a:pt x="5443311" y="2687511"/>
-                  </a:lnTo>
-                  <a:lnTo>
-                    <a:pt x="5514934" y="2689890"/>
-                  </a:lnTo>
-                  <a:lnTo>
-                    <a:pt x="5586557" y="2692262"/>
-                  </a:lnTo>
-                  <a:lnTo>
-                    <a:pt x="5658179" y="2694627"/>
-                  </a:lnTo>
-                  <a:lnTo>
-                    <a:pt x="5729802" y="2696985"/>
-                  </a:lnTo>
-                  <a:lnTo>
-                    <a:pt x="5801424" y="2699336"/>
-                  </a:lnTo>
-                  <a:lnTo>
-                    <a:pt x="5873047" y="2701679"/>
-                  </a:lnTo>
-                  <a:lnTo>
-                    <a:pt x="5944669" y="2704016"/>
-                  </a:lnTo>
-                  <a:lnTo>
-                    <a:pt x="6016292" y="2706346"/>
-                  </a:lnTo>
-                  <a:lnTo>
-                    <a:pt x="6087914" y="2708669"/>
-                  </a:lnTo>
-                  <a:lnTo>
-                    <a:pt x="6159537" y="2710985"/>
-                  </a:lnTo>
-                  <a:lnTo>
-                    <a:pt x="6231159" y="2713294"/>
-                  </a:lnTo>
-                  <a:lnTo>
-                    <a:pt x="6302782" y="2715596"/>
-                  </a:lnTo>
-                  <a:lnTo>
-                    <a:pt x="6374404" y="2717891"/>
-                  </a:lnTo>
-                  <a:lnTo>
-                    <a:pt x="6446027" y="2720179"/>
-                  </a:lnTo>
-                  <a:lnTo>
-                    <a:pt x="6517649" y="2722461"/>
-                  </a:lnTo>
-                  <a:lnTo>
-                    <a:pt x="6589272" y="2724736"/>
-                  </a:lnTo>
-                  <a:lnTo>
-                    <a:pt x="6660894" y="2727004"/>
-                  </a:lnTo>
-                  <a:lnTo>
-                    <a:pt x="6732517" y="2729265"/>
-                  </a:lnTo>
-                  <a:lnTo>
-                    <a:pt x="6804139" y="2731519"/>
-                  </a:lnTo>
-                  <a:lnTo>
-                    <a:pt x="6875762" y="2733767"/>
-                  </a:lnTo>
-                  <a:lnTo>
-                    <a:pt x="6947385" y="2736008"/>
-                  </a:lnTo>
-                  <a:lnTo>
-                    <a:pt x="7019007" y="2738242"/>
-                  </a:lnTo>
-                  <a:lnTo>
-                    <a:pt x="7090630" y="2740469"/>
-                  </a:lnTo>
-                  <a:lnTo>
-                    <a:pt x="7090630" y="3209948"/>
-                  </a:lnTo>
-                  <a:lnTo>
-                    <a:pt x="7019007" y="3201544"/>
-                  </a:lnTo>
-                  <a:lnTo>
-                    <a:pt x="6947385" y="3192883"/>
-                  </a:lnTo>
-                  <a:lnTo>
-                    <a:pt x="6875762" y="3183955"/>
-                  </a:lnTo>
-                  <a:lnTo>
-                    <a:pt x="6804139" y="3174753"/>
-                  </a:lnTo>
-                  <a:lnTo>
-                    <a:pt x="6732517" y="3165269"/>
-                  </a:lnTo>
-                  <a:lnTo>
-                    <a:pt x="6660894" y="3155493"/>
-                  </a:lnTo>
-                  <a:lnTo>
-                    <a:pt x="6589272" y="3145418"/>
-                  </a:lnTo>
-                  <a:lnTo>
-                    <a:pt x="6517649" y="3135033"/>
-                  </a:lnTo>
-                  <a:lnTo>
-                    <a:pt x="6446027" y="3124330"/>
-                  </a:lnTo>
-                  <a:lnTo>
-                    <a:pt x="6374404" y="3113298"/>
-                  </a:lnTo>
-                  <a:lnTo>
-                    <a:pt x="6302782" y="3101927"/>
-                  </a:lnTo>
-                  <a:lnTo>
-                    <a:pt x="6231159" y="3090208"/>
-                  </a:lnTo>
-                  <a:lnTo>
-                    <a:pt x="6159537" y="3078129"/>
-                  </a:lnTo>
-                  <a:lnTo>
-                    <a:pt x="6087914" y="3065679"/>
-                  </a:lnTo>
-                  <a:lnTo>
-                    <a:pt x="6016292" y="3052846"/>
-                  </a:lnTo>
-                  <a:lnTo>
-                    <a:pt x="5944669" y="3039620"/>
-                  </a:lnTo>
-                  <a:lnTo>
-                    <a:pt x="5873047" y="3025988"/>
-                  </a:lnTo>
-                  <a:lnTo>
-                    <a:pt x="5801424" y="3011938"/>
-                  </a:lnTo>
-                  <a:lnTo>
-                    <a:pt x="5729802" y="2997456"/>
-                  </a:lnTo>
-                  <a:lnTo>
-                    <a:pt x="5658179" y="2982530"/>
-                  </a:lnTo>
-                  <a:lnTo>
-                    <a:pt x="5586557" y="2967146"/>
-                  </a:lnTo>
-                  <a:lnTo>
-                    <a:pt x="5514934" y="2951289"/>
-                  </a:lnTo>
-                  <a:lnTo>
-                    <a:pt x="5443311" y="2934946"/>
-                  </a:lnTo>
-                  <a:lnTo>
-                    <a:pt x="5371689" y="2918101"/>
-                  </a:lnTo>
-                  <a:lnTo>
-                    <a:pt x="5300066" y="2900739"/>
-                  </a:lnTo>
-                  <a:lnTo>
-                    <a:pt x="5228444" y="2882844"/>
-                  </a:lnTo>
-                  <a:lnTo>
-                    <a:pt x="5156821" y="2864400"/>
-                  </a:lnTo>
-                  <a:lnTo>
-                    <a:pt x="5085199" y="2845390"/>
-                  </a:lnTo>
-                  <a:lnTo>
-                    <a:pt x="5013576" y="2825796"/>
-                  </a:lnTo>
-                  <a:lnTo>
-                    <a:pt x="4941954" y="2805601"/>
-                  </a:lnTo>
-                  <a:lnTo>
-                    <a:pt x="4870331" y="2784786"/>
-                  </a:lnTo>
-                  <a:lnTo>
-                    <a:pt x="4798709" y="2763332"/>
-                  </a:lnTo>
-                  <a:lnTo>
-                    <a:pt x="4727086" y="2741220"/>
-                  </a:lnTo>
-                  <a:lnTo>
-                    <a:pt x="4655464" y="2718429"/>
-                  </a:lnTo>
-                  <a:lnTo>
-                    <a:pt x="4583841" y="2694938"/>
-                  </a:lnTo>
-                  <a:lnTo>
-                    <a:pt x="4512219" y="2670726"/>
-                  </a:lnTo>
-                  <a:lnTo>
-                    <a:pt x="4440596" y="2653444"/>
-                  </a:lnTo>
-                  <a:lnTo>
-                    <a:pt x="4368974" y="2650956"/>
-                  </a:lnTo>
-                  <a:lnTo>
-                    <a:pt x="4297351" y="2648460"/>
-                  </a:lnTo>
-                  <a:lnTo>
-                    <a:pt x="4225729" y="2645957"/>
-                  </a:lnTo>
-                  <a:lnTo>
-                    <a:pt x="4154106" y="2643446"/>
-                  </a:lnTo>
-                  <a:lnTo>
-                    <a:pt x="4082483" y="2640928"/>
-                  </a:lnTo>
-                  <a:lnTo>
-                    <a:pt x="4010861" y="2638402"/>
-                  </a:lnTo>
-                  <a:lnTo>
-                    <a:pt x="3939238" y="2635868"/>
-                  </a:lnTo>
-                  <a:lnTo>
-                    <a:pt x="3867616" y="2633327"/>
-                  </a:lnTo>
-                  <a:lnTo>
-                    <a:pt x="3795993" y="2630779"/>
-                  </a:lnTo>
-                  <a:lnTo>
-                    <a:pt x="3724371" y="2628222"/>
-                  </a:lnTo>
-                  <a:lnTo>
-                    <a:pt x="3652748" y="2625658"/>
-                  </a:lnTo>
-                  <a:lnTo>
-                    <a:pt x="3581126" y="2623087"/>
-                  </a:lnTo>
-                  <a:lnTo>
-                    <a:pt x="3509503" y="2620507"/>
-                  </a:lnTo>
-                  <a:lnTo>
-                    <a:pt x="3437881" y="2617920"/>
-                  </a:lnTo>
-                  <a:lnTo>
-                    <a:pt x="3366258" y="2615326"/>
-                  </a:lnTo>
-                  <a:lnTo>
-                    <a:pt x="3294636" y="2612723"/>
-                  </a:lnTo>
-                  <a:lnTo>
-                    <a:pt x="3223013" y="2610113"/>
-                  </a:lnTo>
-                  <a:lnTo>
-                    <a:pt x="3151391" y="2607494"/>
-                  </a:lnTo>
-                  <a:lnTo>
-                    <a:pt x="3079768" y="2604868"/>
-                  </a:lnTo>
-                  <a:lnTo>
-                    <a:pt x="3008146" y="2602234"/>
-                  </a:lnTo>
-                  <a:lnTo>
-                    <a:pt x="2936523" y="2599592"/>
-                  </a:lnTo>
-                  <a:lnTo>
-                    <a:pt x="2864901" y="2596943"/>
-                  </a:lnTo>
-                  <a:lnTo>
-                    <a:pt x="2793278" y="2594285"/>
-                  </a:lnTo>
-                  <a:lnTo>
-                    <a:pt x="2721655" y="2591619"/>
-                  </a:lnTo>
-                  <a:lnTo>
-                    <a:pt x="2650033" y="2588946"/>
-                  </a:lnTo>
-                  <a:lnTo>
-                    <a:pt x="2578410" y="2586264"/>
-                  </a:lnTo>
-                  <a:lnTo>
-                    <a:pt x="2506788" y="2583574"/>
-                  </a:lnTo>
-                  <a:lnTo>
-                    <a:pt x="2435165" y="2580877"/>
-                  </a:lnTo>
-                  <a:lnTo>
-                    <a:pt x="2363543" y="2578171"/>
-                  </a:lnTo>
-                  <a:lnTo>
-                    <a:pt x="2291920" y="2575457"/>
-                  </a:lnTo>
-                  <a:lnTo>
-                    <a:pt x="2220298" y="2572735"/>
-                  </a:lnTo>
-                  <a:lnTo>
-                    <a:pt x="2148675" y="2570004"/>
-                  </a:lnTo>
-                  <a:lnTo>
-                    <a:pt x="2077053" y="2567266"/>
-                  </a:lnTo>
-                  <a:lnTo>
-                    <a:pt x="2005430" y="2564519"/>
-                  </a:lnTo>
-                  <a:lnTo>
-                    <a:pt x="1933808" y="2561764"/>
-                  </a:lnTo>
-                  <a:lnTo>
-                    <a:pt x="1862185" y="2559001"/>
-                  </a:lnTo>
-                  <a:lnTo>
-                    <a:pt x="1790563" y="2556230"/>
-                  </a:lnTo>
-                  <a:lnTo>
-                    <a:pt x="1718940" y="2553450"/>
-                  </a:lnTo>
-                  <a:lnTo>
-                    <a:pt x="1647318" y="2550662"/>
-                  </a:lnTo>
-                  <a:lnTo>
-                    <a:pt x="1575695" y="2547866"/>
-                  </a:lnTo>
-                  <a:lnTo>
-                    <a:pt x="1504073" y="2545061"/>
-                  </a:lnTo>
-                  <a:lnTo>
-                    <a:pt x="1432450" y="2542248"/>
-                  </a:lnTo>
-                  <a:lnTo>
-                    <a:pt x="1360827" y="2539426"/>
-                  </a:lnTo>
-                  <a:lnTo>
-                    <a:pt x="1289205" y="2536596"/>
-                  </a:lnTo>
-                  <a:lnTo>
-                    <a:pt x="1217582" y="2533758"/>
-                  </a:lnTo>
-                  <a:lnTo>
-                    <a:pt x="1145960" y="2530911"/>
-                  </a:lnTo>
-                  <a:lnTo>
-                    <a:pt x="1074337" y="2528055"/>
-                  </a:lnTo>
-                  <a:lnTo>
-                    <a:pt x="1002715" y="2525191"/>
-                  </a:lnTo>
-                  <a:lnTo>
-                    <a:pt x="931092" y="2522318"/>
-                  </a:lnTo>
-                  <a:lnTo>
-                    <a:pt x="859470" y="2519437"/>
-                  </a:lnTo>
-                  <a:lnTo>
-                    <a:pt x="787847" y="2516547"/>
-                  </a:lnTo>
-                  <a:lnTo>
-                    <a:pt x="716225" y="2513648"/>
-                  </a:lnTo>
-                  <a:lnTo>
-                    <a:pt x="644602" y="2510741"/>
-                  </a:lnTo>
-                  <a:lnTo>
-                    <a:pt x="572980" y="2507825"/>
-                  </a:lnTo>
-                  <a:lnTo>
-                    <a:pt x="501357" y="2504900"/>
-                  </a:lnTo>
-                  <a:lnTo>
-                    <a:pt x="429735" y="2501966"/>
-                  </a:lnTo>
-                  <a:lnTo>
-                    <a:pt x="358112" y="2499024"/>
-                  </a:lnTo>
-                  <a:lnTo>
-                    <a:pt x="286490" y="2496073"/>
-                  </a:lnTo>
-                  <a:lnTo>
-                    <a:pt x="214867" y="2493113"/>
-                  </a:lnTo>
-                  <a:lnTo>
-                    <a:pt x="143245" y="2490144"/>
-                  </a:lnTo>
-                  <a:lnTo>
-                    <a:pt x="71622" y="2487166"/>
-                  </a:lnTo>
-                  <a:lnTo>
-                    <a:pt x="0" y="2484180"/>
+                    <a:pt x="1217582" y="82140"/>
+                  </a:lnTo>
+                  <a:lnTo>
+                    <a:pt x="1289205" y="185775"/>
+                  </a:lnTo>
+                  <a:lnTo>
+                    <a:pt x="1360827" y="286253"/>
+                  </a:lnTo>
+                  <a:lnTo>
+                    <a:pt x="1432450" y="383670"/>
+                  </a:lnTo>
+                  <a:lnTo>
+                    <a:pt x="1504073" y="478119"/>
+                  </a:lnTo>
+                  <a:lnTo>
+                    <a:pt x="1575695" y="569691"/>
+                  </a:lnTo>
+                  <a:lnTo>
+                    <a:pt x="1647318" y="658472"/>
+                  </a:lnTo>
+                  <a:lnTo>
+                    <a:pt x="1718940" y="744549"/>
+                  </a:lnTo>
+                  <a:lnTo>
+                    <a:pt x="1790563" y="828003"/>
+                  </a:lnTo>
+                  <a:lnTo>
+                    <a:pt x="1862185" y="908914"/>
+                  </a:lnTo>
+                  <a:lnTo>
+                    <a:pt x="1933808" y="987361"/>
+                  </a:lnTo>
+                  <a:lnTo>
+                    <a:pt x="2005430" y="1063417"/>
+                  </a:lnTo>
+                  <a:lnTo>
+                    <a:pt x="2077053" y="1137157"/>
+                  </a:lnTo>
+                  <a:lnTo>
+                    <a:pt x="2148675" y="1208649"/>
+                  </a:lnTo>
+                  <a:lnTo>
+                    <a:pt x="2220298" y="1277964"/>
+                  </a:lnTo>
+                  <a:lnTo>
+                    <a:pt x="2291920" y="1345167"/>
+                  </a:lnTo>
+                  <a:lnTo>
+                    <a:pt x="2363543" y="1410322"/>
+                  </a:lnTo>
+                  <a:lnTo>
+                    <a:pt x="2435165" y="1473492"/>
+                  </a:lnTo>
+                  <a:lnTo>
+                    <a:pt x="2506788" y="1534738"/>
+                  </a:lnTo>
+                  <a:lnTo>
+                    <a:pt x="2578410" y="1594118"/>
+                  </a:lnTo>
+                  <a:lnTo>
+                    <a:pt x="2650033" y="1651689"/>
+                  </a:lnTo>
+                  <a:lnTo>
+                    <a:pt x="2721655" y="1707505"/>
+                  </a:lnTo>
+                  <a:lnTo>
+                    <a:pt x="2793278" y="1761621"/>
+                  </a:lnTo>
+                  <a:lnTo>
+                    <a:pt x="2864901" y="1814089"/>
+                  </a:lnTo>
+                  <a:lnTo>
+                    <a:pt x="2936523" y="1864958"/>
+                  </a:lnTo>
+                  <a:lnTo>
+                    <a:pt x="3008146" y="1914277"/>
+                  </a:lnTo>
+                  <a:lnTo>
+                    <a:pt x="3079768" y="1962093"/>
+                  </a:lnTo>
+                  <a:lnTo>
+                    <a:pt x="3151391" y="2008453"/>
+                  </a:lnTo>
+                  <a:lnTo>
+                    <a:pt x="3223013" y="2053400"/>
+                  </a:lnTo>
+                  <a:lnTo>
+                    <a:pt x="3294636" y="2096978"/>
+                  </a:lnTo>
+                  <a:lnTo>
+                    <a:pt x="3366258" y="2139228"/>
+                  </a:lnTo>
+                  <a:lnTo>
+                    <a:pt x="3437881" y="2180191"/>
+                  </a:lnTo>
+                  <a:lnTo>
+                    <a:pt x="3509503" y="2219906"/>
+                  </a:lnTo>
+                  <a:lnTo>
+                    <a:pt x="3581126" y="2258411"/>
+                  </a:lnTo>
+                  <a:lnTo>
+                    <a:pt x="3652748" y="2295743"/>
+                  </a:lnTo>
+                  <a:lnTo>
+                    <a:pt x="3724371" y="2331937"/>
+                  </a:lnTo>
+                  <a:lnTo>
+                    <a:pt x="3795993" y="2367029"/>
+                  </a:lnTo>
+                  <a:lnTo>
+                    <a:pt x="3867616" y="2401052"/>
+                  </a:lnTo>
+                  <a:lnTo>
+                    <a:pt x="3939238" y="2434038"/>
+                  </a:lnTo>
+                  <a:lnTo>
+                    <a:pt x="4010861" y="2466019"/>
+                  </a:lnTo>
+                  <a:lnTo>
+                    <a:pt x="4082483" y="2497026"/>
+                  </a:lnTo>
+                  <a:lnTo>
+                    <a:pt x="4154106" y="2527088"/>
+                  </a:lnTo>
+                  <a:lnTo>
+                    <a:pt x="4225729" y="2556234"/>
+                  </a:lnTo>
+                  <a:lnTo>
+                    <a:pt x="4297351" y="2584492"/>
+                  </a:lnTo>
+                  <a:lnTo>
+                    <a:pt x="4368974" y="2611889"/>
+                  </a:lnTo>
+                  <a:lnTo>
+                    <a:pt x="4440596" y="2638452"/>
+                  </a:lnTo>
+                  <a:lnTo>
+                    <a:pt x="4512219" y="2655470"/>
+                  </a:lnTo>
+                  <a:lnTo>
+                    <a:pt x="4583841" y="2658516"/>
+                  </a:lnTo>
+                  <a:lnTo>
+                    <a:pt x="4655464" y="2661550"/>
+                  </a:lnTo>
+                  <a:lnTo>
+                    <a:pt x="4727086" y="2664574"/>
+                  </a:lnTo>
+                  <a:lnTo>
+                    <a:pt x="4798709" y="2667586"/>
+                  </a:lnTo>
+                  <a:lnTo>
+                    <a:pt x="4870331" y="2670587"/>
+                  </a:lnTo>
+                  <a:lnTo>
+                    <a:pt x="4941954" y="2673577"/>
+                  </a:lnTo>
+                  <a:lnTo>
+                    <a:pt x="5013576" y="2676556"/>
+                  </a:lnTo>
+                  <a:lnTo>
+                    <a:pt x="5085199" y="2679524"/>
+                  </a:lnTo>
+                  <a:lnTo>
+                    <a:pt x="5156821" y="2682481"/>
+                  </a:lnTo>
+                  <a:lnTo>
+                    <a:pt x="5228444" y="2685427"/>
+                  </a:lnTo>
+                  <a:lnTo>
+                    <a:pt x="5300066" y="2688363"/>
+                  </a:lnTo>
+                  <a:lnTo>
+                    <a:pt x="5371689" y="2691287"/>
+                  </a:lnTo>
+                  <a:lnTo>
+                    <a:pt x="5443311" y="2694201"/>
+                  </a:lnTo>
+                  <a:lnTo>
+                    <a:pt x="5514934" y="2697104"/>
+                  </a:lnTo>
+                  <a:lnTo>
+                    <a:pt x="5586557" y="2699997"/>
+                  </a:lnTo>
+                  <a:lnTo>
+                    <a:pt x="5658179" y="2702879"/>
+                  </a:lnTo>
+                  <a:lnTo>
+                    <a:pt x="5729802" y="2705750"/>
+                  </a:lnTo>
+                  <a:lnTo>
+                    <a:pt x="5801424" y="2708611"/>
+                  </a:lnTo>
+                  <a:lnTo>
+                    <a:pt x="5873047" y="2711461"/>
+                  </a:lnTo>
+                  <a:lnTo>
+                    <a:pt x="5944669" y="2714301"/>
+                  </a:lnTo>
+                  <a:lnTo>
+                    <a:pt x="6016292" y="2717130"/>
+                  </a:lnTo>
+                  <a:lnTo>
+                    <a:pt x="6087914" y="2719949"/>
+                  </a:lnTo>
+                  <a:lnTo>
+                    <a:pt x="6159537" y="2722757"/>
+                  </a:lnTo>
+                  <a:lnTo>
+                    <a:pt x="6231159" y="2725555"/>
+                  </a:lnTo>
+                  <a:lnTo>
+                    <a:pt x="6302782" y="2728343"/>
+                  </a:lnTo>
+                  <a:lnTo>
+                    <a:pt x="6374404" y="2731121"/>
+                  </a:lnTo>
+                  <a:lnTo>
+                    <a:pt x="6446027" y="2733888"/>
+                  </a:lnTo>
+                  <a:lnTo>
+                    <a:pt x="6517649" y="2736645"/>
+                  </a:lnTo>
+                  <a:lnTo>
+                    <a:pt x="6589272" y="2739393"/>
+                  </a:lnTo>
+                  <a:lnTo>
+                    <a:pt x="6660894" y="2742130"/>
+                  </a:lnTo>
+                  <a:lnTo>
+                    <a:pt x="6732517" y="2744857"/>
+                  </a:lnTo>
+                  <a:lnTo>
+                    <a:pt x="6804139" y="2747573"/>
+                  </a:lnTo>
+                  <a:lnTo>
+                    <a:pt x="6875762" y="2750280"/>
+                  </a:lnTo>
+                  <a:lnTo>
+                    <a:pt x="6947385" y="2752977"/>
+                  </a:lnTo>
+                  <a:lnTo>
+                    <a:pt x="7019007" y="2755664"/>
+                  </a:lnTo>
+                  <a:lnTo>
+                    <a:pt x="7090630" y="2758342"/>
+                  </a:lnTo>
+                  <a:lnTo>
+                    <a:pt x="7090630" y="3214698"/>
+                  </a:lnTo>
+                  <a:lnTo>
+                    <a:pt x="7019007" y="3206244"/>
+                  </a:lnTo>
+                  <a:lnTo>
+                    <a:pt x="6947385" y="3197523"/>
+                  </a:lnTo>
+                  <a:lnTo>
+                    <a:pt x="6875762" y="3188529"/>
+                  </a:lnTo>
+                  <a:lnTo>
+                    <a:pt x="6804139" y="3179252"/>
+                  </a:lnTo>
+                  <a:lnTo>
+                    <a:pt x="6732517" y="3169684"/>
+                  </a:lnTo>
+                  <a:lnTo>
+                    <a:pt x="6660894" y="3159815"/>
+                  </a:lnTo>
+                  <a:lnTo>
+                    <a:pt x="6589272" y="3149636"/>
+                  </a:lnTo>
+                  <a:lnTo>
+                    <a:pt x="6517649" y="3139136"/>
+                  </a:lnTo>
+                  <a:lnTo>
+                    <a:pt x="6446027" y="3128307"/>
+                  </a:lnTo>
+                  <a:lnTo>
+                    <a:pt x="6374404" y="3117138"/>
+                  </a:lnTo>
+                  <a:lnTo>
+                    <a:pt x="6302782" y="3105618"/>
+                  </a:lnTo>
+                  <a:lnTo>
+                    <a:pt x="6231159" y="3093735"/>
+                  </a:lnTo>
+                  <a:lnTo>
+                    <a:pt x="6159537" y="3081480"/>
+                  </a:lnTo>
+                  <a:lnTo>
+                    <a:pt x="6087914" y="3068839"/>
+                  </a:lnTo>
+                  <a:lnTo>
+                    <a:pt x="6016292" y="3055801"/>
+                  </a:lnTo>
+                  <a:lnTo>
+                    <a:pt x="5944669" y="3042353"/>
+                  </a:lnTo>
+                  <a:lnTo>
+                    <a:pt x="5873047" y="3028483"/>
+                  </a:lnTo>
+                  <a:lnTo>
+                    <a:pt x="5801424" y="3014176"/>
+                  </a:lnTo>
+                  <a:lnTo>
+                    <a:pt x="5729802" y="2999421"/>
+                  </a:lnTo>
+                  <a:lnTo>
+                    <a:pt x="5658179" y="2984201"/>
+                  </a:lnTo>
+                  <a:lnTo>
+                    <a:pt x="5586557" y="2968503"/>
+                  </a:lnTo>
+                  <a:lnTo>
+                    <a:pt x="5514934" y="2952312"/>
+                  </a:lnTo>
+                  <a:lnTo>
+                    <a:pt x="5443311" y="2935613"/>
+                  </a:lnTo>
+                  <a:lnTo>
+                    <a:pt x="5371689" y="2918388"/>
+                  </a:lnTo>
+                  <a:lnTo>
+                    <a:pt x="5300066" y="2900622"/>
+                  </a:lnTo>
+                  <a:lnTo>
+                    <a:pt x="5228444" y="2882298"/>
+                  </a:lnTo>
+                  <a:lnTo>
+                    <a:pt x="5156821" y="2863398"/>
+                  </a:lnTo>
+                  <a:lnTo>
+                    <a:pt x="5085199" y="2843904"/>
+                  </a:lnTo>
+                  <a:lnTo>
+                    <a:pt x="5013576" y="2823798"/>
+                  </a:lnTo>
+                  <a:lnTo>
+                    <a:pt x="4941954" y="2803060"/>
+                  </a:lnTo>
+                  <a:lnTo>
+                    <a:pt x="4870331" y="2781670"/>
+                  </a:lnTo>
+                  <a:lnTo>
+                    <a:pt x="4798709" y="2759608"/>
+                  </a:lnTo>
+                  <a:lnTo>
+                    <a:pt x="4727086" y="2736852"/>
+                  </a:lnTo>
+                  <a:lnTo>
+                    <a:pt x="4655464" y="2713382"/>
+                  </a:lnTo>
+                  <a:lnTo>
+                    <a:pt x="4583841" y="2689174"/>
+                  </a:lnTo>
+                  <a:lnTo>
+                    <a:pt x="4512219" y="2664205"/>
+                  </a:lnTo>
+                  <a:lnTo>
+                    <a:pt x="4440596" y="2652414"/>
+                  </a:lnTo>
+                  <a:lnTo>
+                    <a:pt x="4368974" y="2649346"/>
+                  </a:lnTo>
+                  <a:lnTo>
+                    <a:pt x="4297351" y="2646266"/>
+                  </a:lnTo>
+                  <a:lnTo>
+                    <a:pt x="4225729" y="2643175"/>
+                  </a:lnTo>
+                  <a:lnTo>
+                    <a:pt x="4154106" y="2640073"/>
+                  </a:lnTo>
+                  <a:lnTo>
+                    <a:pt x="4082483" y="2636960"/>
+                  </a:lnTo>
+                  <a:lnTo>
+                    <a:pt x="4010861" y="2633834"/>
+                  </a:lnTo>
+                  <a:lnTo>
+                    <a:pt x="3939238" y="2630698"/>
+                  </a:lnTo>
+                  <a:lnTo>
+                    <a:pt x="3867616" y="2627549"/>
+                  </a:lnTo>
+                  <a:lnTo>
+                    <a:pt x="3795993" y="2624390"/>
+                  </a:lnTo>
+                  <a:lnTo>
+                    <a:pt x="3724371" y="2621218"/>
+                  </a:lnTo>
+                  <a:lnTo>
+                    <a:pt x="3652748" y="2618035"/>
+                  </a:lnTo>
+                  <a:lnTo>
+                    <a:pt x="3581126" y="2614840"/>
+                  </a:lnTo>
+                  <a:lnTo>
+                    <a:pt x="3509503" y="2611633"/>
+                  </a:lnTo>
+                  <a:lnTo>
+                    <a:pt x="3437881" y="2608414"/>
+                  </a:lnTo>
+                  <a:lnTo>
+                    <a:pt x="3366258" y="2605184"/>
+                  </a:lnTo>
+                  <a:lnTo>
+                    <a:pt x="3294636" y="2601942"/>
+                  </a:lnTo>
+                  <a:lnTo>
+                    <a:pt x="3223013" y="2598687"/>
+                  </a:lnTo>
+                  <a:lnTo>
+                    <a:pt x="3151391" y="2595421"/>
+                  </a:lnTo>
+                  <a:lnTo>
+                    <a:pt x="3079768" y="2592142"/>
+                  </a:lnTo>
+                  <a:lnTo>
+                    <a:pt x="3008146" y="2588852"/>
+                  </a:lnTo>
+                  <a:lnTo>
+                    <a:pt x="2936523" y="2585549"/>
+                  </a:lnTo>
+                  <a:lnTo>
+                    <a:pt x="2864901" y="2582234"/>
+                  </a:lnTo>
+                  <a:lnTo>
+                    <a:pt x="2793278" y="2578907"/>
+                  </a:lnTo>
+                  <a:lnTo>
+                    <a:pt x="2721655" y="2575568"/>
+                  </a:lnTo>
+                  <a:lnTo>
+                    <a:pt x="2650033" y="2572216"/>
+                  </a:lnTo>
+                  <a:lnTo>
+                    <a:pt x="2578410" y="2568852"/>
+                  </a:lnTo>
+                  <a:lnTo>
+                    <a:pt x="2506788" y="2565476"/>
+                  </a:lnTo>
+                  <a:lnTo>
+                    <a:pt x="2435165" y="2562087"/>
+                  </a:lnTo>
+                  <a:lnTo>
+                    <a:pt x="2363543" y="2558685"/>
+                  </a:lnTo>
+                  <a:lnTo>
+                    <a:pt x="2291920" y="2555271"/>
+                  </a:lnTo>
+                  <a:lnTo>
+                    <a:pt x="2220298" y="2551845"/>
+                  </a:lnTo>
+                  <a:lnTo>
+                    <a:pt x="2148675" y="2548405"/>
+                  </a:lnTo>
+                  <a:lnTo>
+                    <a:pt x="2077053" y="2544953"/>
+                  </a:lnTo>
+                  <a:lnTo>
+                    <a:pt x="2005430" y="2541489"/>
+                  </a:lnTo>
+                  <a:lnTo>
+                    <a:pt x="1933808" y="2538011"/>
+                  </a:lnTo>
+                  <a:lnTo>
+                    <a:pt x="1862185" y="2534521"/>
+                  </a:lnTo>
+                  <a:lnTo>
+                    <a:pt x="1790563" y="2531018"/>
+                  </a:lnTo>
+                  <a:lnTo>
+                    <a:pt x="1718940" y="2527502"/>
+                  </a:lnTo>
+                  <a:lnTo>
+                    <a:pt x="1647318" y="2523972"/>
+                  </a:lnTo>
+                  <a:lnTo>
+                    <a:pt x="1575695" y="2520430"/>
+                  </a:lnTo>
+                  <a:lnTo>
+                    <a:pt x="1504073" y="2516875"/>
+                  </a:lnTo>
+                  <a:lnTo>
+                    <a:pt x="1432450" y="2513307"/>
+                  </a:lnTo>
+                  <a:lnTo>
+                    <a:pt x="1360827" y="2509725"/>
+                  </a:lnTo>
+                  <a:lnTo>
+                    <a:pt x="1289205" y="2506131"/>
+                  </a:lnTo>
+                  <a:lnTo>
+                    <a:pt x="1217582" y="2502523"/>
+                  </a:lnTo>
+                  <a:lnTo>
+                    <a:pt x="1145960" y="2498901"/>
+                  </a:lnTo>
+                  <a:lnTo>
+                    <a:pt x="1074337" y="2495267"/>
+                  </a:lnTo>
+                  <a:lnTo>
+                    <a:pt x="1002715" y="2491619"/>
+                  </a:lnTo>
+                  <a:lnTo>
+                    <a:pt x="931092" y="2487957"/>
+                  </a:lnTo>
+                  <a:lnTo>
+                    <a:pt x="859470" y="2484282"/>
+                  </a:lnTo>
+                  <a:lnTo>
+                    <a:pt x="787847" y="2480593"/>
+                  </a:lnTo>
+                  <a:lnTo>
+                    <a:pt x="716225" y="2476891"/>
+                  </a:lnTo>
+                  <a:lnTo>
+                    <a:pt x="644602" y="2473175"/>
+                  </a:lnTo>
+                  <a:lnTo>
+                    <a:pt x="572980" y="2469446"/>
+                  </a:lnTo>
+                  <a:lnTo>
+                    <a:pt x="501357" y="2465702"/>
+                  </a:lnTo>
+                  <a:lnTo>
+                    <a:pt x="429735" y="2461945"/>
+                  </a:lnTo>
+                  <a:lnTo>
+                    <a:pt x="358112" y="2458174"/>
+                  </a:lnTo>
+                  <a:lnTo>
+                    <a:pt x="286490" y="2454389"/>
+                  </a:lnTo>
+                  <a:lnTo>
+                    <a:pt x="214867" y="2450590"/>
+                  </a:lnTo>
+                  <a:lnTo>
+                    <a:pt x="143245" y="2446777"/>
+                  </a:lnTo>
+                  <a:lnTo>
+                    <a:pt x="71622" y="2442950"/>
+                  </a:lnTo>
+                  <a:lnTo>
+                    <a:pt x="0" y="2439109"/>
                   </a:lnTo>
                   <a:close/>
                 </a:path>
@@ -3505,270 +3499,264 @@
           </p:nvSpPr>
           <p:spPr>
             <a:xfrm>
-              <a:off x="2237141" y="2073503"/>
-              <a:ext cx="6025538" cy="2740469"/>
+              <a:off x="2334594" y="2073503"/>
+              <a:ext cx="5928084" cy="2758342"/>
             </a:xfrm>
             <a:custGeom>
               <a:avLst/>
               <a:pathLst>
-                <a:path w="6025538" h="2740469">
+                <a:path w="5928084" h="2758342">
                   <a:moveTo>
                     <a:pt x="0" y="0"/>
                   </a:moveTo>
                   <a:lnTo>
-                    <a:pt x="9245" y="13749"/>
-                  </a:lnTo>
-                  <a:lnTo>
-                    <a:pt x="80868" y="117085"/>
-                  </a:lnTo>
-                  <a:lnTo>
-                    <a:pt x="152490" y="217344"/>
-                  </a:lnTo>
-                  <a:lnTo>
-                    <a:pt x="224113" y="314617"/>
-                  </a:lnTo>
-                  <a:lnTo>
-                    <a:pt x="295736" y="408994"/>
-                  </a:lnTo>
-                  <a:lnTo>
-                    <a:pt x="367358" y="500560"/>
-                  </a:lnTo>
-                  <a:lnTo>
-                    <a:pt x="438981" y="589399"/>
-                  </a:lnTo>
-                  <a:lnTo>
-                    <a:pt x="510603" y="675592"/>
-                  </a:lnTo>
-                  <a:lnTo>
-                    <a:pt x="582226" y="759219"/>
-                  </a:lnTo>
-                  <a:lnTo>
-                    <a:pt x="653848" y="840355"/>
-                  </a:lnTo>
-                  <a:lnTo>
-                    <a:pt x="725471" y="919075"/>
-                  </a:lnTo>
-                  <a:lnTo>
-                    <a:pt x="797093" y="995451"/>
-                  </a:lnTo>
-                  <a:lnTo>
-                    <a:pt x="868716" y="1069552"/>
-                  </a:lnTo>
-                  <a:lnTo>
-                    <a:pt x="940338" y="1141447"/>
-                  </a:lnTo>
-                  <a:lnTo>
-                    <a:pt x="1011961" y="1211200"/>
-                  </a:lnTo>
-                  <a:lnTo>
-                    <a:pt x="1083583" y="1278877"/>
-                  </a:lnTo>
-                  <a:lnTo>
-                    <a:pt x="1155206" y="1344538"/>
-                  </a:lnTo>
-                  <a:lnTo>
-                    <a:pt x="1226828" y="1408243"/>
-                  </a:lnTo>
-                  <a:lnTo>
-                    <a:pt x="1298451" y="1470051"/>
-                  </a:lnTo>
-                  <a:lnTo>
-                    <a:pt x="1370073" y="1530019"/>
-                  </a:lnTo>
-                  <a:lnTo>
-                    <a:pt x="1441696" y="1588201"/>
-                  </a:lnTo>
-                  <a:lnTo>
-                    <a:pt x="1513318" y="1644650"/>
-                  </a:lnTo>
-                  <a:lnTo>
-                    <a:pt x="1584941" y="1699418"/>
-                  </a:lnTo>
-                  <a:lnTo>
-                    <a:pt x="1656564" y="1752556"/>
-                  </a:lnTo>
-                  <a:lnTo>
-                    <a:pt x="1728186" y="1804110"/>
-                  </a:lnTo>
-                  <a:lnTo>
-                    <a:pt x="1799809" y="1854130"/>
-                  </a:lnTo>
-                  <a:lnTo>
-                    <a:pt x="1871431" y="1902660"/>
-                  </a:lnTo>
-                  <a:lnTo>
-                    <a:pt x="1943054" y="1949744"/>
-                  </a:lnTo>
-                  <a:lnTo>
-                    <a:pt x="2014676" y="1995427"/>
-                  </a:lnTo>
-                  <a:lnTo>
-                    <a:pt x="2086299" y="2039749"/>
-                  </a:lnTo>
-                  <a:lnTo>
-                    <a:pt x="2157921" y="2082751"/>
-                  </a:lnTo>
-                  <a:lnTo>
-                    <a:pt x="2229544" y="2124473"/>
-                  </a:lnTo>
-                  <a:lnTo>
-                    <a:pt x="2301166" y="2164952"/>
-                  </a:lnTo>
-                  <a:lnTo>
-                    <a:pt x="2372789" y="2204225"/>
-                  </a:lnTo>
-                  <a:lnTo>
-                    <a:pt x="2444411" y="2242329"/>
-                  </a:lnTo>
-                  <a:lnTo>
-                    <a:pt x="2516034" y="2279299"/>
-                  </a:lnTo>
-                  <a:lnTo>
-                    <a:pt x="2587656" y="2315167"/>
-                  </a:lnTo>
-                  <a:lnTo>
-                    <a:pt x="2659279" y="2349967"/>
-                  </a:lnTo>
-                  <a:lnTo>
-                    <a:pt x="2730901" y="2383731"/>
-                  </a:lnTo>
-                  <a:lnTo>
-                    <a:pt x="2802524" y="2416490"/>
-                  </a:lnTo>
-                  <a:lnTo>
-                    <a:pt x="2874146" y="2448272"/>
-                  </a:lnTo>
-                  <a:lnTo>
-                    <a:pt x="2945769" y="2479109"/>
-                  </a:lnTo>
-                  <a:lnTo>
-                    <a:pt x="3017392" y="2509027"/>
-                  </a:lnTo>
-                  <a:lnTo>
-                    <a:pt x="3089014" y="2538054"/>
-                  </a:lnTo>
-                  <a:lnTo>
-                    <a:pt x="3160637" y="2566217"/>
-                  </a:lnTo>
-                  <a:lnTo>
-                    <a:pt x="3232259" y="2593541"/>
-                  </a:lnTo>
-                  <a:lnTo>
-                    <a:pt x="3303882" y="2620051"/>
-                  </a:lnTo>
-                  <a:lnTo>
-                    <a:pt x="3375504" y="2645772"/>
-                  </a:lnTo>
-                  <a:lnTo>
-                    <a:pt x="3447127" y="2655925"/>
-                  </a:lnTo>
-                  <a:lnTo>
-                    <a:pt x="3518749" y="2658399"/>
-                  </a:lnTo>
-                  <a:lnTo>
-                    <a:pt x="3590372" y="2660865"/>
-                  </a:lnTo>
-                  <a:lnTo>
-                    <a:pt x="3661994" y="2663324"/>
-                  </a:lnTo>
-                  <a:lnTo>
-                    <a:pt x="3733617" y="2665775"/>
-                  </a:lnTo>
-                  <a:lnTo>
-                    <a:pt x="3805239" y="2668219"/>
-                  </a:lnTo>
-                  <a:lnTo>
-                    <a:pt x="3876862" y="2670656"/>
-                  </a:lnTo>
-                  <a:lnTo>
-                    <a:pt x="3948484" y="2673085"/>
-                  </a:lnTo>
-                  <a:lnTo>
-                    <a:pt x="4020107" y="2675508"/>
-                  </a:lnTo>
-                  <a:lnTo>
-                    <a:pt x="4091729" y="2677923"/>
-                  </a:lnTo>
-                  <a:lnTo>
-                    <a:pt x="4163352" y="2680330"/>
-                  </a:lnTo>
-                  <a:lnTo>
-                    <a:pt x="4234974" y="2682731"/>
-                  </a:lnTo>
-                  <a:lnTo>
-                    <a:pt x="4306597" y="2685124"/>
-                  </a:lnTo>
-                  <a:lnTo>
-                    <a:pt x="4378220" y="2687511"/>
-                  </a:lnTo>
-                  <a:lnTo>
-                    <a:pt x="4449842" y="2689890"/>
-                  </a:lnTo>
-                  <a:lnTo>
-                    <a:pt x="4521465" y="2692262"/>
-                  </a:lnTo>
-                  <a:lnTo>
-                    <a:pt x="4593087" y="2694627"/>
-                  </a:lnTo>
-                  <a:lnTo>
-                    <a:pt x="4664710" y="2696985"/>
-                  </a:lnTo>
-                  <a:lnTo>
-                    <a:pt x="4736332" y="2699336"/>
-                  </a:lnTo>
-                  <a:lnTo>
-                    <a:pt x="4807955" y="2701679"/>
-                  </a:lnTo>
-                  <a:lnTo>
-                    <a:pt x="4879577" y="2704016"/>
-                  </a:lnTo>
-                  <a:lnTo>
-                    <a:pt x="4951200" y="2706346"/>
-                  </a:lnTo>
-                  <a:lnTo>
-                    <a:pt x="5022822" y="2708669"/>
-                  </a:lnTo>
-                  <a:lnTo>
-                    <a:pt x="5094445" y="2710985"/>
-                  </a:lnTo>
-                  <a:lnTo>
-                    <a:pt x="5166067" y="2713294"/>
-                  </a:lnTo>
-                  <a:lnTo>
-                    <a:pt x="5237690" y="2715596"/>
-                  </a:lnTo>
-                  <a:lnTo>
-                    <a:pt x="5309312" y="2717891"/>
-                  </a:lnTo>
-                  <a:lnTo>
-                    <a:pt x="5380935" y="2720179"/>
-                  </a:lnTo>
-                  <a:lnTo>
-                    <a:pt x="5452557" y="2722461"/>
-                  </a:lnTo>
-                  <a:lnTo>
-                    <a:pt x="5524180" y="2724736"/>
-                  </a:lnTo>
-                  <a:lnTo>
-                    <a:pt x="5595802" y="2727004"/>
-                  </a:lnTo>
-                  <a:lnTo>
-                    <a:pt x="5667425" y="2729265"/>
-                  </a:lnTo>
-                  <a:lnTo>
-                    <a:pt x="5739048" y="2731519"/>
-                  </a:lnTo>
-                  <a:lnTo>
-                    <a:pt x="5810670" y="2733767"/>
-                  </a:lnTo>
-                  <a:lnTo>
-                    <a:pt x="5882293" y="2736008"/>
-                  </a:lnTo>
-                  <a:lnTo>
-                    <a:pt x="5953915" y="2738242"/>
-                  </a:lnTo>
-                  <a:lnTo>
-                    <a:pt x="6025538" y="2740469"/>
+                    <a:pt x="55037" y="82140"/>
+                  </a:lnTo>
+                  <a:lnTo>
+                    <a:pt x="126660" y="185775"/>
+                  </a:lnTo>
+                  <a:lnTo>
+                    <a:pt x="198282" y="286253"/>
+                  </a:lnTo>
+                  <a:lnTo>
+                    <a:pt x="269905" y="383670"/>
+                  </a:lnTo>
+                  <a:lnTo>
+                    <a:pt x="341527" y="478119"/>
+                  </a:lnTo>
+                  <a:lnTo>
+                    <a:pt x="413150" y="569691"/>
+                  </a:lnTo>
+                  <a:lnTo>
+                    <a:pt x="484772" y="658472"/>
+                  </a:lnTo>
+                  <a:lnTo>
+                    <a:pt x="556395" y="744549"/>
+                  </a:lnTo>
+                  <a:lnTo>
+                    <a:pt x="628017" y="828003"/>
+                  </a:lnTo>
+                  <a:lnTo>
+                    <a:pt x="699640" y="908914"/>
+                  </a:lnTo>
+                  <a:lnTo>
+                    <a:pt x="771262" y="987361"/>
+                  </a:lnTo>
+                  <a:lnTo>
+                    <a:pt x="842885" y="1063417"/>
+                  </a:lnTo>
+                  <a:lnTo>
+                    <a:pt x="914507" y="1137157"/>
+                  </a:lnTo>
+                  <a:lnTo>
+                    <a:pt x="986130" y="1208649"/>
+                  </a:lnTo>
+                  <a:lnTo>
+                    <a:pt x="1057752" y="1277964"/>
+                  </a:lnTo>
+                  <a:lnTo>
+                    <a:pt x="1129375" y="1345167"/>
+                  </a:lnTo>
+                  <a:lnTo>
+                    <a:pt x="1200997" y="1410322"/>
+                  </a:lnTo>
+                  <a:lnTo>
+                    <a:pt x="1272620" y="1473492"/>
+                  </a:lnTo>
+                  <a:lnTo>
+                    <a:pt x="1344243" y="1534738"/>
+                  </a:lnTo>
+                  <a:lnTo>
+                    <a:pt x="1415865" y="1594118"/>
+                  </a:lnTo>
+                  <a:lnTo>
+                    <a:pt x="1487488" y="1651689"/>
+                  </a:lnTo>
+                  <a:lnTo>
+                    <a:pt x="1559110" y="1707505"/>
+                  </a:lnTo>
+                  <a:lnTo>
+                    <a:pt x="1630733" y="1761621"/>
+                  </a:lnTo>
+                  <a:lnTo>
+                    <a:pt x="1702355" y="1814089"/>
+                  </a:lnTo>
+                  <a:lnTo>
+                    <a:pt x="1773978" y="1864958"/>
+                  </a:lnTo>
+                  <a:lnTo>
+                    <a:pt x="1845600" y="1914277"/>
+                  </a:lnTo>
+                  <a:lnTo>
+                    <a:pt x="1917223" y="1962093"/>
+                  </a:lnTo>
+                  <a:lnTo>
+                    <a:pt x="1988845" y="2008453"/>
+                  </a:lnTo>
+                  <a:lnTo>
+                    <a:pt x="2060468" y="2053400"/>
+                  </a:lnTo>
+                  <a:lnTo>
+                    <a:pt x="2132090" y="2096978"/>
+                  </a:lnTo>
+                  <a:lnTo>
+                    <a:pt x="2203713" y="2139228"/>
+                  </a:lnTo>
+                  <a:lnTo>
+                    <a:pt x="2275335" y="2180191"/>
+                  </a:lnTo>
+                  <a:lnTo>
+                    <a:pt x="2346958" y="2219906"/>
+                  </a:lnTo>
+                  <a:lnTo>
+                    <a:pt x="2418580" y="2258411"/>
+                  </a:lnTo>
+                  <a:lnTo>
+                    <a:pt x="2490203" y="2295743"/>
+                  </a:lnTo>
+                  <a:lnTo>
+                    <a:pt x="2561825" y="2331937"/>
+                  </a:lnTo>
+                  <a:lnTo>
+                    <a:pt x="2633448" y="2367029"/>
+                  </a:lnTo>
+                  <a:lnTo>
+                    <a:pt x="2705071" y="2401052"/>
+                  </a:lnTo>
+                  <a:lnTo>
+                    <a:pt x="2776693" y="2434038"/>
+                  </a:lnTo>
+                  <a:lnTo>
+                    <a:pt x="2848316" y="2466019"/>
+                  </a:lnTo>
+                  <a:lnTo>
+                    <a:pt x="2919938" y="2497026"/>
+                  </a:lnTo>
+                  <a:lnTo>
+                    <a:pt x="2991561" y="2527088"/>
+                  </a:lnTo>
+                  <a:lnTo>
+                    <a:pt x="3063183" y="2556234"/>
+                  </a:lnTo>
+                  <a:lnTo>
+                    <a:pt x="3134806" y="2584492"/>
+                  </a:lnTo>
+                  <a:lnTo>
+                    <a:pt x="3206428" y="2611889"/>
+                  </a:lnTo>
+                  <a:lnTo>
+                    <a:pt x="3278051" y="2638452"/>
+                  </a:lnTo>
+                  <a:lnTo>
+                    <a:pt x="3349673" y="2655470"/>
+                  </a:lnTo>
+                  <a:lnTo>
+                    <a:pt x="3421296" y="2658516"/>
+                  </a:lnTo>
+                  <a:lnTo>
+                    <a:pt x="3492918" y="2661550"/>
+                  </a:lnTo>
+                  <a:lnTo>
+                    <a:pt x="3564541" y="2664574"/>
+                  </a:lnTo>
+                  <a:lnTo>
+                    <a:pt x="3636163" y="2667586"/>
+                  </a:lnTo>
+                  <a:lnTo>
+                    <a:pt x="3707786" y="2670587"/>
+                  </a:lnTo>
+                  <a:lnTo>
+                    <a:pt x="3779408" y="2673577"/>
+                  </a:lnTo>
+                  <a:lnTo>
+                    <a:pt x="3851031" y="2676556"/>
+                  </a:lnTo>
+                  <a:lnTo>
+                    <a:pt x="3922653" y="2679524"/>
+                  </a:lnTo>
+                  <a:lnTo>
+                    <a:pt x="3994276" y="2682481"/>
+                  </a:lnTo>
+                  <a:lnTo>
+                    <a:pt x="4065899" y="2685427"/>
+                  </a:lnTo>
+                  <a:lnTo>
+                    <a:pt x="4137521" y="2688363"/>
+                  </a:lnTo>
+                  <a:lnTo>
+                    <a:pt x="4209144" y="2691287"/>
+                  </a:lnTo>
+                  <a:lnTo>
+                    <a:pt x="4280766" y="2694201"/>
+                  </a:lnTo>
+                  <a:lnTo>
+                    <a:pt x="4352389" y="2697104"/>
+                  </a:lnTo>
+                  <a:lnTo>
+                    <a:pt x="4424011" y="2699997"/>
+                  </a:lnTo>
+                  <a:lnTo>
+                    <a:pt x="4495634" y="2702879"/>
+                  </a:lnTo>
+                  <a:lnTo>
+                    <a:pt x="4567256" y="2705750"/>
+                  </a:lnTo>
+                  <a:lnTo>
+                    <a:pt x="4638879" y="2708611"/>
+                  </a:lnTo>
+                  <a:lnTo>
+                    <a:pt x="4710501" y="2711461"/>
+                  </a:lnTo>
+                  <a:lnTo>
+                    <a:pt x="4782124" y="2714301"/>
+                  </a:lnTo>
+                  <a:lnTo>
+                    <a:pt x="4853746" y="2717130"/>
+                  </a:lnTo>
+                  <a:lnTo>
+                    <a:pt x="4925369" y="2719949"/>
+                  </a:lnTo>
+                  <a:lnTo>
+                    <a:pt x="4996991" y="2722757"/>
+                  </a:lnTo>
+                  <a:lnTo>
+                    <a:pt x="5068614" y="2725555"/>
+                  </a:lnTo>
+                  <a:lnTo>
+                    <a:pt x="5140236" y="2728343"/>
+                  </a:lnTo>
+                  <a:lnTo>
+                    <a:pt x="5211859" y="2731121"/>
+                  </a:lnTo>
+                  <a:lnTo>
+                    <a:pt x="5283481" y="2733888"/>
+                  </a:lnTo>
+                  <a:lnTo>
+                    <a:pt x="5355104" y="2736645"/>
+                  </a:lnTo>
+                  <a:lnTo>
+                    <a:pt x="5426727" y="2739393"/>
+                  </a:lnTo>
+                  <a:lnTo>
+                    <a:pt x="5498349" y="2742130"/>
+                  </a:lnTo>
+                  <a:lnTo>
+                    <a:pt x="5569972" y="2744857"/>
+                  </a:lnTo>
+                  <a:lnTo>
+                    <a:pt x="5641594" y="2747573"/>
+                  </a:lnTo>
+                  <a:lnTo>
+                    <a:pt x="5713217" y="2750280"/>
+                  </a:lnTo>
+                  <a:lnTo>
+                    <a:pt x="5784839" y="2752977"/>
+                  </a:lnTo>
+                  <a:lnTo>
+                    <a:pt x="5856462" y="2755664"/>
+                  </a:lnTo>
+                  <a:lnTo>
+                    <a:pt x="5928084" y="2758342"/>
                   </a:lnTo>
                 </a:path>
               </a:pathLst>
@@ -3788,309 +3776,309 @@
           </p:nvSpPr>
           <p:spPr>
             <a:xfrm>
-              <a:off x="1172049" y="4557683"/>
-              <a:ext cx="7090630" cy="725768"/>
+              <a:off x="1172049" y="4512612"/>
+              <a:ext cx="7090630" cy="775589"/>
             </a:xfrm>
             <a:custGeom>
               <a:avLst/>
               <a:pathLst>
-                <a:path w="7090630" h="725768">
+                <a:path w="7090630" h="775589">
                   <a:moveTo>
-                    <a:pt x="7090630" y="725768"/>
+                    <a:pt x="7090630" y="775589"/>
                   </a:moveTo>
                   <a:lnTo>
-                    <a:pt x="7019007" y="717364"/>
-                  </a:lnTo>
-                  <a:lnTo>
-                    <a:pt x="6947385" y="708702"/>
-                  </a:lnTo>
-                  <a:lnTo>
-                    <a:pt x="6875762" y="699775"/>
-                  </a:lnTo>
-                  <a:lnTo>
-                    <a:pt x="6804139" y="690573"/>
-                  </a:lnTo>
-                  <a:lnTo>
-                    <a:pt x="6732517" y="681089"/>
-                  </a:lnTo>
-                  <a:lnTo>
-                    <a:pt x="6660894" y="671313"/>
-                  </a:lnTo>
-                  <a:lnTo>
-                    <a:pt x="6589272" y="661238"/>
-                  </a:lnTo>
-                  <a:lnTo>
-                    <a:pt x="6517649" y="650853"/>
-                  </a:lnTo>
-                  <a:lnTo>
-                    <a:pt x="6446027" y="640150"/>
-                  </a:lnTo>
-                  <a:lnTo>
-                    <a:pt x="6374404" y="629118"/>
-                  </a:lnTo>
-                  <a:lnTo>
-                    <a:pt x="6302782" y="617747"/>
-                  </a:lnTo>
-                  <a:lnTo>
-                    <a:pt x="6231159" y="606028"/>
-                  </a:lnTo>
-                  <a:lnTo>
-                    <a:pt x="6159537" y="593948"/>
-                  </a:lnTo>
-                  <a:lnTo>
-                    <a:pt x="6087914" y="581498"/>
-                  </a:lnTo>
-                  <a:lnTo>
-                    <a:pt x="6016292" y="568666"/>
-                  </a:lnTo>
-                  <a:lnTo>
-                    <a:pt x="5944669" y="555440"/>
-                  </a:lnTo>
-                  <a:lnTo>
-                    <a:pt x="5873047" y="541808"/>
-                  </a:lnTo>
-                  <a:lnTo>
-                    <a:pt x="5801424" y="527758"/>
-                  </a:lnTo>
-                  <a:lnTo>
-                    <a:pt x="5729802" y="513276"/>
-                  </a:lnTo>
-                  <a:lnTo>
-                    <a:pt x="5658179" y="498350"/>
-                  </a:lnTo>
-                  <a:lnTo>
-                    <a:pt x="5586557" y="482966"/>
-                  </a:lnTo>
-                  <a:lnTo>
-                    <a:pt x="5514934" y="467109"/>
-                  </a:lnTo>
-                  <a:lnTo>
-                    <a:pt x="5443311" y="450766"/>
-                  </a:lnTo>
-                  <a:lnTo>
-                    <a:pt x="5371689" y="433921"/>
-                  </a:lnTo>
-                  <a:lnTo>
-                    <a:pt x="5300066" y="416559"/>
-                  </a:lnTo>
-                  <a:lnTo>
-                    <a:pt x="5228444" y="398664"/>
-                  </a:lnTo>
-                  <a:lnTo>
-                    <a:pt x="5156821" y="380220"/>
-                  </a:lnTo>
-                  <a:lnTo>
-                    <a:pt x="5085199" y="361210"/>
-                  </a:lnTo>
-                  <a:lnTo>
-                    <a:pt x="5013576" y="341616"/>
-                  </a:lnTo>
-                  <a:lnTo>
-                    <a:pt x="4941954" y="321421"/>
-                  </a:lnTo>
-                  <a:lnTo>
-                    <a:pt x="4870331" y="300606"/>
-                  </a:lnTo>
-                  <a:lnTo>
-                    <a:pt x="4798709" y="279152"/>
-                  </a:lnTo>
-                  <a:lnTo>
-                    <a:pt x="4727086" y="257040"/>
-                  </a:lnTo>
-                  <a:lnTo>
-                    <a:pt x="4655464" y="234249"/>
-                  </a:lnTo>
-                  <a:lnTo>
-                    <a:pt x="4583841" y="210758"/>
-                  </a:lnTo>
-                  <a:lnTo>
-                    <a:pt x="4512219" y="186546"/>
-                  </a:lnTo>
-                  <a:lnTo>
-                    <a:pt x="4440596" y="169264"/>
-                  </a:lnTo>
-                  <a:lnTo>
-                    <a:pt x="4368974" y="166776"/>
-                  </a:lnTo>
-                  <a:lnTo>
-                    <a:pt x="4297351" y="164280"/>
-                  </a:lnTo>
-                  <a:lnTo>
-                    <a:pt x="4225729" y="161777"/>
-                  </a:lnTo>
-                  <a:lnTo>
-                    <a:pt x="4154106" y="159266"/>
-                  </a:lnTo>
-                  <a:lnTo>
-                    <a:pt x="4082483" y="156748"/>
-                  </a:lnTo>
-                  <a:lnTo>
-                    <a:pt x="4010861" y="154222"/>
-                  </a:lnTo>
-                  <a:lnTo>
-                    <a:pt x="3939238" y="151688"/>
-                  </a:lnTo>
-                  <a:lnTo>
-                    <a:pt x="3867616" y="149147"/>
-                  </a:lnTo>
-                  <a:lnTo>
-                    <a:pt x="3795993" y="146598"/>
-                  </a:lnTo>
-                  <a:lnTo>
-                    <a:pt x="3724371" y="144042"/>
-                  </a:lnTo>
-                  <a:lnTo>
-                    <a:pt x="3652748" y="141478"/>
-                  </a:lnTo>
-                  <a:lnTo>
-                    <a:pt x="3581126" y="138907"/>
-                  </a:lnTo>
-                  <a:lnTo>
-                    <a:pt x="3509503" y="136327"/>
-                  </a:lnTo>
-                  <a:lnTo>
-                    <a:pt x="3437881" y="133740"/>
-                  </a:lnTo>
-                  <a:lnTo>
-                    <a:pt x="3366258" y="131145"/>
-                  </a:lnTo>
-                  <a:lnTo>
-                    <a:pt x="3294636" y="128543"/>
-                  </a:lnTo>
-                  <a:lnTo>
-                    <a:pt x="3223013" y="125932"/>
-                  </a:lnTo>
-                  <a:lnTo>
-                    <a:pt x="3151391" y="123314"/>
-                  </a:lnTo>
-                  <a:lnTo>
-                    <a:pt x="3079768" y="120688"/>
-                  </a:lnTo>
-                  <a:lnTo>
-                    <a:pt x="3008146" y="118054"/>
-                  </a:lnTo>
-                  <a:lnTo>
-                    <a:pt x="2936523" y="115412"/>
-                  </a:lnTo>
-                  <a:lnTo>
-                    <a:pt x="2864901" y="112763"/>
-                  </a:lnTo>
-                  <a:lnTo>
-                    <a:pt x="2793278" y="110105"/>
-                  </a:lnTo>
-                  <a:lnTo>
-                    <a:pt x="2721655" y="107439"/>
-                  </a:lnTo>
-                  <a:lnTo>
-                    <a:pt x="2650033" y="104766"/>
-                  </a:lnTo>
-                  <a:lnTo>
-                    <a:pt x="2578410" y="102084"/>
-                  </a:lnTo>
-                  <a:lnTo>
-                    <a:pt x="2506788" y="99394"/>
-                  </a:lnTo>
-                  <a:lnTo>
-                    <a:pt x="2435165" y="96696"/>
-                  </a:lnTo>
-                  <a:lnTo>
-                    <a:pt x="2363543" y="93991"/>
-                  </a:lnTo>
-                  <a:lnTo>
-                    <a:pt x="2291920" y="91277"/>
-                  </a:lnTo>
-                  <a:lnTo>
-                    <a:pt x="2220298" y="88555"/>
-                  </a:lnTo>
-                  <a:lnTo>
-                    <a:pt x="2148675" y="85824"/>
-                  </a:lnTo>
-                  <a:lnTo>
-                    <a:pt x="2077053" y="83086"/>
-                  </a:lnTo>
-                  <a:lnTo>
-                    <a:pt x="2005430" y="80339"/>
-                  </a:lnTo>
-                  <a:lnTo>
-                    <a:pt x="1933808" y="77584"/>
-                  </a:lnTo>
-                  <a:lnTo>
-                    <a:pt x="1862185" y="74821"/>
-                  </a:lnTo>
-                  <a:lnTo>
-                    <a:pt x="1790563" y="72050"/>
-                  </a:lnTo>
-                  <a:lnTo>
-                    <a:pt x="1718940" y="69270"/>
-                  </a:lnTo>
-                  <a:lnTo>
-                    <a:pt x="1647318" y="66482"/>
-                  </a:lnTo>
-                  <a:lnTo>
-                    <a:pt x="1575695" y="63686"/>
-                  </a:lnTo>
-                  <a:lnTo>
-                    <a:pt x="1504073" y="60881"/>
-                  </a:lnTo>
-                  <a:lnTo>
-                    <a:pt x="1432450" y="58068"/>
-                  </a:lnTo>
-                  <a:lnTo>
-                    <a:pt x="1360827" y="55246"/>
-                  </a:lnTo>
-                  <a:lnTo>
-                    <a:pt x="1289205" y="52416"/>
-                  </a:lnTo>
-                  <a:lnTo>
-                    <a:pt x="1217582" y="49577"/>
-                  </a:lnTo>
-                  <a:lnTo>
-                    <a:pt x="1145960" y="46730"/>
-                  </a:lnTo>
-                  <a:lnTo>
-                    <a:pt x="1074337" y="43875"/>
-                  </a:lnTo>
-                  <a:lnTo>
-                    <a:pt x="1002715" y="41011"/>
-                  </a:lnTo>
-                  <a:lnTo>
-                    <a:pt x="931092" y="38138"/>
-                  </a:lnTo>
-                  <a:lnTo>
-                    <a:pt x="859470" y="35257"/>
-                  </a:lnTo>
-                  <a:lnTo>
-                    <a:pt x="787847" y="32367"/>
-                  </a:lnTo>
-                  <a:lnTo>
-                    <a:pt x="716225" y="29468"/>
-                  </a:lnTo>
-                  <a:lnTo>
-                    <a:pt x="644602" y="26561"/>
-                  </a:lnTo>
-                  <a:lnTo>
-                    <a:pt x="572980" y="23645"/>
-                  </a:lnTo>
-                  <a:lnTo>
-                    <a:pt x="501357" y="20720"/>
-                  </a:lnTo>
-                  <a:lnTo>
-                    <a:pt x="429735" y="17786"/>
-                  </a:lnTo>
-                  <a:lnTo>
-                    <a:pt x="358112" y="14844"/>
-                  </a:lnTo>
-                  <a:lnTo>
-                    <a:pt x="286490" y="11893"/>
-                  </a:lnTo>
-                  <a:lnTo>
-                    <a:pt x="214867" y="8933"/>
-                  </a:lnTo>
-                  <a:lnTo>
-                    <a:pt x="143245" y="5964"/>
-                  </a:lnTo>
-                  <a:lnTo>
-                    <a:pt x="71622" y="2986"/>
+                    <a:pt x="7019007" y="767134"/>
+                  </a:lnTo>
+                  <a:lnTo>
+                    <a:pt x="6947385" y="758414"/>
+                  </a:lnTo>
+                  <a:lnTo>
+                    <a:pt x="6875762" y="749420"/>
+                  </a:lnTo>
+                  <a:lnTo>
+                    <a:pt x="6804139" y="740143"/>
+                  </a:lnTo>
+                  <a:lnTo>
+                    <a:pt x="6732517" y="730574"/>
+                  </a:lnTo>
+                  <a:lnTo>
+                    <a:pt x="6660894" y="720705"/>
+                  </a:lnTo>
+                  <a:lnTo>
+                    <a:pt x="6589272" y="710526"/>
+                  </a:lnTo>
+                  <a:lnTo>
+                    <a:pt x="6517649" y="700027"/>
+                  </a:lnTo>
+                  <a:lnTo>
+                    <a:pt x="6446027" y="689198"/>
+                  </a:lnTo>
+                  <a:lnTo>
+                    <a:pt x="6374404" y="678028"/>
+                  </a:lnTo>
+                  <a:lnTo>
+                    <a:pt x="6302782" y="666508"/>
+                  </a:lnTo>
+                  <a:lnTo>
+                    <a:pt x="6231159" y="654626"/>
+                  </a:lnTo>
+                  <a:lnTo>
+                    <a:pt x="6159537" y="642370"/>
+                  </a:lnTo>
+                  <a:lnTo>
+                    <a:pt x="6087914" y="629729"/>
+                  </a:lnTo>
+                  <a:lnTo>
+                    <a:pt x="6016292" y="616691"/>
+                  </a:lnTo>
+                  <a:lnTo>
+                    <a:pt x="5944669" y="603243"/>
+                  </a:lnTo>
+                  <a:lnTo>
+                    <a:pt x="5873047" y="589373"/>
+                  </a:lnTo>
+                  <a:lnTo>
+                    <a:pt x="5801424" y="575067"/>
+                  </a:lnTo>
+                  <a:lnTo>
+                    <a:pt x="5729802" y="560311"/>
+                  </a:lnTo>
+                  <a:lnTo>
+                    <a:pt x="5658179" y="545091"/>
+                  </a:lnTo>
+                  <a:lnTo>
+                    <a:pt x="5586557" y="529394"/>
+                  </a:lnTo>
+                  <a:lnTo>
+                    <a:pt x="5514934" y="513203"/>
+                  </a:lnTo>
+                  <a:lnTo>
+                    <a:pt x="5443311" y="496503"/>
+                  </a:lnTo>
+                  <a:lnTo>
+                    <a:pt x="5371689" y="479278"/>
+                  </a:lnTo>
+                  <a:lnTo>
+                    <a:pt x="5300066" y="461513"/>
+                  </a:lnTo>
+                  <a:lnTo>
+                    <a:pt x="5228444" y="443188"/>
+                  </a:lnTo>
+                  <a:lnTo>
+                    <a:pt x="5156821" y="424288"/>
+                  </a:lnTo>
+                  <a:lnTo>
+                    <a:pt x="5085199" y="404795"/>
+                  </a:lnTo>
+                  <a:lnTo>
+                    <a:pt x="5013576" y="384688"/>
+                  </a:lnTo>
+                  <a:lnTo>
+                    <a:pt x="4941954" y="363950"/>
+                  </a:lnTo>
+                  <a:lnTo>
+                    <a:pt x="4870331" y="342560"/>
+                  </a:lnTo>
+                  <a:lnTo>
+                    <a:pt x="4798709" y="320498"/>
+                  </a:lnTo>
+                  <a:lnTo>
+                    <a:pt x="4727086" y="297743"/>
+                  </a:lnTo>
+                  <a:lnTo>
+                    <a:pt x="4655464" y="274272"/>
+                  </a:lnTo>
+                  <a:lnTo>
+                    <a:pt x="4583841" y="250064"/>
+                  </a:lnTo>
+                  <a:lnTo>
+                    <a:pt x="4512219" y="225096"/>
+                  </a:lnTo>
+                  <a:lnTo>
+                    <a:pt x="4440596" y="213304"/>
+                  </a:lnTo>
+                  <a:lnTo>
+                    <a:pt x="4368974" y="210236"/>
+                  </a:lnTo>
+                  <a:lnTo>
+                    <a:pt x="4297351" y="207156"/>
+                  </a:lnTo>
+                  <a:lnTo>
+                    <a:pt x="4225729" y="204066"/>
+                  </a:lnTo>
+                  <a:lnTo>
+                    <a:pt x="4154106" y="200963"/>
+                  </a:lnTo>
+                  <a:lnTo>
+                    <a:pt x="4082483" y="197850"/>
+                  </a:lnTo>
+                  <a:lnTo>
+                    <a:pt x="4010861" y="194725"/>
+                  </a:lnTo>
+                  <a:lnTo>
+                    <a:pt x="3939238" y="191588"/>
+                  </a:lnTo>
+                  <a:lnTo>
+                    <a:pt x="3867616" y="188440"/>
+                  </a:lnTo>
+                  <a:lnTo>
+                    <a:pt x="3795993" y="185280"/>
+                  </a:lnTo>
+                  <a:lnTo>
+                    <a:pt x="3724371" y="182108"/>
+                  </a:lnTo>
+                  <a:lnTo>
+                    <a:pt x="3652748" y="178925"/>
+                  </a:lnTo>
+                  <a:lnTo>
+                    <a:pt x="3581126" y="175730"/>
+                  </a:lnTo>
+                  <a:lnTo>
+                    <a:pt x="3509503" y="172523"/>
+                  </a:lnTo>
+                  <a:lnTo>
+                    <a:pt x="3437881" y="169305"/>
+                  </a:lnTo>
+                  <a:lnTo>
+                    <a:pt x="3366258" y="166074"/>
+                  </a:lnTo>
+                  <a:lnTo>
+                    <a:pt x="3294636" y="162832"/>
+                  </a:lnTo>
+                  <a:lnTo>
+                    <a:pt x="3223013" y="159578"/>
+                  </a:lnTo>
+                  <a:lnTo>
+                    <a:pt x="3151391" y="156311"/>
+                  </a:lnTo>
+                  <a:lnTo>
+                    <a:pt x="3079768" y="153033"/>
+                  </a:lnTo>
+                  <a:lnTo>
+                    <a:pt x="3008146" y="149742"/>
+                  </a:lnTo>
+                  <a:lnTo>
+                    <a:pt x="2936523" y="146440"/>
+                  </a:lnTo>
+                  <a:lnTo>
+                    <a:pt x="2864901" y="143125"/>
+                  </a:lnTo>
+                  <a:lnTo>
+                    <a:pt x="2793278" y="139798"/>
+                  </a:lnTo>
+                  <a:lnTo>
+                    <a:pt x="2721655" y="136458"/>
+                  </a:lnTo>
+                  <a:lnTo>
+                    <a:pt x="2650033" y="133106"/>
+                  </a:lnTo>
+                  <a:lnTo>
+                    <a:pt x="2578410" y="129742"/>
+                  </a:lnTo>
+                  <a:lnTo>
+                    <a:pt x="2506788" y="126366"/>
+                  </a:lnTo>
+                  <a:lnTo>
+                    <a:pt x="2435165" y="122977"/>
+                  </a:lnTo>
+                  <a:lnTo>
+                    <a:pt x="2363543" y="119575"/>
+                  </a:lnTo>
+                  <a:lnTo>
+                    <a:pt x="2291920" y="116161"/>
+                  </a:lnTo>
+                  <a:lnTo>
+                    <a:pt x="2220298" y="112735"/>
+                  </a:lnTo>
+                  <a:lnTo>
+                    <a:pt x="2148675" y="109296"/>
+                  </a:lnTo>
+                  <a:lnTo>
+                    <a:pt x="2077053" y="105844"/>
+                  </a:lnTo>
+                  <a:lnTo>
+                    <a:pt x="2005430" y="102379"/>
+                  </a:lnTo>
+                  <a:lnTo>
+                    <a:pt x="1933808" y="98901"/>
+                  </a:lnTo>
+                  <a:lnTo>
+                    <a:pt x="1862185" y="95411"/>
+                  </a:lnTo>
+                  <a:lnTo>
+                    <a:pt x="1790563" y="91908"/>
+                  </a:lnTo>
+                  <a:lnTo>
+                    <a:pt x="1718940" y="88392"/>
+                  </a:lnTo>
+                  <a:lnTo>
+                    <a:pt x="1647318" y="84863"/>
+                  </a:lnTo>
+                  <a:lnTo>
+                    <a:pt x="1575695" y="81321"/>
+                  </a:lnTo>
+                  <a:lnTo>
+                    <a:pt x="1504073" y="77765"/>
+                  </a:lnTo>
+                  <a:lnTo>
+                    <a:pt x="1432450" y="74197"/>
+                  </a:lnTo>
+                  <a:lnTo>
+                    <a:pt x="1360827" y="70616"/>
+                  </a:lnTo>
+                  <a:lnTo>
+                    <a:pt x="1289205" y="67021"/>
+                  </a:lnTo>
+                  <a:lnTo>
+                    <a:pt x="1217582" y="63413"/>
+                  </a:lnTo>
+                  <a:lnTo>
+                    <a:pt x="1145960" y="59792"/>
+                  </a:lnTo>
+                  <a:lnTo>
+                    <a:pt x="1074337" y="56157"/>
+                  </a:lnTo>
+                  <a:lnTo>
+                    <a:pt x="1002715" y="52509"/>
+                  </a:lnTo>
+                  <a:lnTo>
+                    <a:pt x="931092" y="48847"/>
+                  </a:lnTo>
+                  <a:lnTo>
+                    <a:pt x="859470" y="45172"/>
+                  </a:lnTo>
+                  <a:lnTo>
+                    <a:pt x="787847" y="41484"/>
+                  </a:lnTo>
+                  <a:lnTo>
+                    <a:pt x="716225" y="37782"/>
+                  </a:lnTo>
+                  <a:lnTo>
+                    <a:pt x="644602" y="34066"/>
+                  </a:lnTo>
+                  <a:lnTo>
+                    <a:pt x="572980" y="30336"/>
+                  </a:lnTo>
+                  <a:lnTo>
+                    <a:pt x="501357" y="26593"/>
+                  </a:lnTo>
+                  <a:lnTo>
+                    <a:pt x="429735" y="22836"/>
+                  </a:lnTo>
+                  <a:lnTo>
+                    <a:pt x="358112" y="19064"/>
+                  </a:lnTo>
+                  <a:lnTo>
+                    <a:pt x="286490" y="15280"/>
+                  </a:lnTo>
+                  <a:lnTo>
+                    <a:pt x="214867" y="11481"/>
+                  </a:lnTo>
+                  <a:lnTo>
+                    <a:pt x="143245" y="7668"/>
+                  </a:lnTo>
+                  <a:lnTo>
+                    <a:pt x="71622" y="3841"/>
                   </a:lnTo>
                   <a:lnTo>
                     <a:pt x="0" y="0"/>
@@ -4113,312 +4101,312 @@
           </p:nvSpPr>
           <p:spPr>
             <a:xfrm>
-              <a:off x="1172049" y="3220869"/>
-              <a:ext cx="7090630" cy="1885262"/>
+              <a:off x="1172049" y="3105131"/>
+              <a:ext cx="7090630" cy="2010339"/>
             </a:xfrm>
             <a:custGeom>
               <a:avLst/>
               <a:pathLst>
-                <a:path w="7090630" h="1885262">
+                <a:path w="7090630" h="2010339">
                   <a:moveTo>
                     <a:pt x="0" y="0"/>
                   </a:moveTo>
                   <a:lnTo>
-                    <a:pt x="71622" y="38492"/>
-                  </a:lnTo>
-                  <a:lnTo>
-                    <a:pt x="143245" y="76350"/>
-                  </a:lnTo>
-                  <a:lnTo>
-                    <a:pt x="214867" y="113584"/>
-                  </a:lnTo>
-                  <a:lnTo>
-                    <a:pt x="286490" y="150205"/>
-                  </a:lnTo>
-                  <a:lnTo>
-                    <a:pt x="358112" y="186223"/>
-                  </a:lnTo>
-                  <a:lnTo>
-                    <a:pt x="429735" y="221647"/>
-                  </a:lnTo>
-                  <a:lnTo>
-                    <a:pt x="501357" y="256488"/>
-                  </a:lnTo>
-                  <a:lnTo>
-                    <a:pt x="572980" y="290754"/>
-                  </a:lnTo>
-                  <a:lnTo>
-                    <a:pt x="644602" y="324456"/>
-                  </a:lnTo>
-                  <a:lnTo>
-                    <a:pt x="716225" y="357603"/>
-                  </a:lnTo>
-                  <a:lnTo>
-                    <a:pt x="787847" y="390204"/>
-                  </a:lnTo>
-                  <a:lnTo>
-                    <a:pt x="859470" y="422268"/>
-                  </a:lnTo>
-                  <a:lnTo>
-                    <a:pt x="931092" y="453803"/>
-                  </a:lnTo>
-                  <a:lnTo>
-                    <a:pt x="1002715" y="484819"/>
-                  </a:lnTo>
-                  <a:lnTo>
-                    <a:pt x="1074337" y="515324"/>
-                  </a:lnTo>
-                  <a:lnTo>
-                    <a:pt x="1145960" y="545326"/>
-                  </a:lnTo>
-                  <a:lnTo>
-                    <a:pt x="1217582" y="574834"/>
-                  </a:lnTo>
-                  <a:lnTo>
-                    <a:pt x="1289205" y="603856"/>
-                  </a:lnTo>
-                  <a:lnTo>
-                    <a:pt x="1360827" y="632399"/>
-                  </a:lnTo>
-                  <a:lnTo>
-                    <a:pt x="1432450" y="660473"/>
-                  </a:lnTo>
-                  <a:lnTo>
-                    <a:pt x="1504073" y="688084"/>
-                  </a:lnTo>
-                  <a:lnTo>
-                    <a:pt x="1575695" y="715240"/>
-                  </a:lnTo>
-                  <a:lnTo>
-                    <a:pt x="1647318" y="741948"/>
-                  </a:lnTo>
-                  <a:lnTo>
-                    <a:pt x="1718940" y="768217"/>
-                  </a:lnTo>
-                  <a:lnTo>
-                    <a:pt x="1790563" y="794052"/>
-                  </a:lnTo>
-                  <a:lnTo>
-                    <a:pt x="1862185" y="819463"/>
-                  </a:lnTo>
-                  <a:lnTo>
-                    <a:pt x="1933808" y="844454"/>
-                  </a:lnTo>
-                  <a:lnTo>
-                    <a:pt x="2005430" y="869034"/>
-                  </a:lnTo>
-                  <a:lnTo>
-                    <a:pt x="2077053" y="893209"/>
-                  </a:lnTo>
-                  <a:lnTo>
-                    <a:pt x="2148675" y="916985"/>
-                  </a:lnTo>
-                  <a:lnTo>
-                    <a:pt x="2220298" y="940370"/>
-                  </a:lnTo>
-                  <a:lnTo>
-                    <a:pt x="2291920" y="963370"/>
-                  </a:lnTo>
-                  <a:lnTo>
-                    <a:pt x="2363543" y="985990"/>
-                  </a:lnTo>
-                  <a:lnTo>
-                    <a:pt x="2435165" y="1008238"/>
-                  </a:lnTo>
-                  <a:lnTo>
-                    <a:pt x="2506788" y="1030119"/>
-                  </a:lnTo>
-                  <a:lnTo>
-                    <a:pt x="2578410" y="1051640"/>
-                  </a:lnTo>
-                  <a:lnTo>
-                    <a:pt x="2650033" y="1072807"/>
-                  </a:lnTo>
-                  <a:lnTo>
-                    <a:pt x="2721655" y="1093624"/>
-                  </a:lnTo>
-                  <a:lnTo>
-                    <a:pt x="2793278" y="1114099"/>
-                  </a:lnTo>
-                  <a:lnTo>
-                    <a:pt x="2864901" y="1134236"/>
-                  </a:lnTo>
-                  <a:lnTo>
-                    <a:pt x="2936523" y="1154042"/>
-                  </a:lnTo>
-                  <a:lnTo>
-                    <a:pt x="3008146" y="1173521"/>
-                  </a:lnTo>
-                  <a:lnTo>
-                    <a:pt x="3079768" y="1192679"/>
-                  </a:lnTo>
-                  <a:lnTo>
-                    <a:pt x="3151391" y="1211522"/>
-                  </a:lnTo>
-                  <a:lnTo>
-                    <a:pt x="3223013" y="1230054"/>
-                  </a:lnTo>
-                  <a:lnTo>
-                    <a:pt x="3294636" y="1248281"/>
-                  </a:lnTo>
-                  <a:lnTo>
-                    <a:pt x="3366258" y="1266208"/>
-                  </a:lnTo>
-                  <a:lnTo>
-                    <a:pt x="3437881" y="1283839"/>
-                  </a:lnTo>
-                  <a:lnTo>
-                    <a:pt x="3509503" y="1301180"/>
-                  </a:lnTo>
-                  <a:lnTo>
-                    <a:pt x="3581126" y="1318235"/>
-                  </a:lnTo>
-                  <a:lnTo>
-                    <a:pt x="3652748" y="1335009"/>
-                  </a:lnTo>
-                  <a:lnTo>
-                    <a:pt x="3724371" y="1351507"/>
-                  </a:lnTo>
-                  <a:lnTo>
-                    <a:pt x="3795993" y="1367733"/>
-                  </a:lnTo>
-                  <a:lnTo>
-                    <a:pt x="3867616" y="1383692"/>
-                  </a:lnTo>
-                  <a:lnTo>
-                    <a:pt x="3939238" y="1399387"/>
-                  </a:lnTo>
-                  <a:lnTo>
-                    <a:pt x="4010861" y="1414824"/>
-                  </a:lnTo>
-                  <a:lnTo>
-                    <a:pt x="4082483" y="1430007"/>
-                  </a:lnTo>
-                  <a:lnTo>
-                    <a:pt x="4154106" y="1444940"/>
-                  </a:lnTo>
-                  <a:lnTo>
-                    <a:pt x="4225729" y="1459626"/>
-                  </a:lnTo>
-                  <a:lnTo>
-                    <a:pt x="4297351" y="1474071"/>
-                  </a:lnTo>
-                  <a:lnTo>
-                    <a:pt x="4368974" y="1488278"/>
-                  </a:lnTo>
-                  <a:lnTo>
-                    <a:pt x="4440596" y="1502250"/>
-                  </a:lnTo>
-                  <a:lnTo>
-                    <a:pt x="4512219" y="1515993"/>
-                  </a:lnTo>
-                  <a:lnTo>
-                    <a:pt x="4583841" y="1529509"/>
-                  </a:lnTo>
-                  <a:lnTo>
-                    <a:pt x="4655464" y="1542802"/>
-                  </a:lnTo>
-                  <a:lnTo>
-                    <a:pt x="4727086" y="1555877"/>
-                  </a:lnTo>
-                  <a:lnTo>
-                    <a:pt x="4798709" y="1568736"/>
-                  </a:lnTo>
-                  <a:lnTo>
-                    <a:pt x="4870331" y="1581383"/>
-                  </a:lnTo>
-                  <a:lnTo>
-                    <a:pt x="4941954" y="1593821"/>
-                  </a:lnTo>
-                  <a:lnTo>
-                    <a:pt x="5013576" y="1606055"/>
-                  </a:lnTo>
-                  <a:lnTo>
-                    <a:pt x="5085199" y="1618087"/>
-                  </a:lnTo>
-                  <a:lnTo>
-                    <a:pt x="5156821" y="1629921"/>
-                  </a:lnTo>
-                  <a:lnTo>
-                    <a:pt x="5228444" y="1641560"/>
-                  </a:lnTo>
-                  <a:lnTo>
-                    <a:pt x="5300066" y="1653008"/>
-                  </a:lnTo>
-                  <a:lnTo>
-                    <a:pt x="5371689" y="1664266"/>
-                  </a:lnTo>
-                  <a:lnTo>
-                    <a:pt x="5443311" y="1675340"/>
-                  </a:lnTo>
-                  <a:lnTo>
-                    <a:pt x="5514934" y="1686230"/>
-                  </a:lnTo>
-                  <a:lnTo>
-                    <a:pt x="5586557" y="1696942"/>
-                  </a:lnTo>
-                  <a:lnTo>
-                    <a:pt x="5658179" y="1707477"/>
-                  </a:lnTo>
-                  <a:lnTo>
-                    <a:pt x="5729802" y="1717838"/>
-                  </a:lnTo>
-                  <a:lnTo>
-                    <a:pt x="5801424" y="1728029"/>
-                  </a:lnTo>
-                  <a:lnTo>
-                    <a:pt x="5873047" y="1738051"/>
-                  </a:lnTo>
-                  <a:lnTo>
-                    <a:pt x="5944669" y="1747909"/>
-                  </a:lnTo>
-                  <a:lnTo>
-                    <a:pt x="6016292" y="1757604"/>
-                  </a:lnTo>
-                  <a:lnTo>
-                    <a:pt x="6087914" y="1767139"/>
-                  </a:lnTo>
-                  <a:lnTo>
-                    <a:pt x="6159537" y="1776518"/>
-                  </a:lnTo>
-                  <a:lnTo>
-                    <a:pt x="6231159" y="1785742"/>
-                  </a:lnTo>
-                  <a:lnTo>
-                    <a:pt x="6302782" y="1794813"/>
-                  </a:lnTo>
-                  <a:lnTo>
-                    <a:pt x="6374404" y="1803736"/>
-                  </a:lnTo>
-                  <a:lnTo>
-                    <a:pt x="6446027" y="1812511"/>
-                  </a:lnTo>
-                  <a:lnTo>
-                    <a:pt x="6517649" y="1821142"/>
-                  </a:lnTo>
-                  <a:lnTo>
-                    <a:pt x="6589272" y="1829631"/>
-                  </a:lnTo>
-                  <a:lnTo>
-                    <a:pt x="6660894" y="1837980"/>
-                  </a:lnTo>
-                  <a:lnTo>
-                    <a:pt x="6732517" y="1846191"/>
-                  </a:lnTo>
-                  <a:lnTo>
-                    <a:pt x="6804139" y="1854267"/>
-                  </a:lnTo>
-                  <a:lnTo>
-                    <a:pt x="6875762" y="1862210"/>
-                  </a:lnTo>
-                  <a:lnTo>
-                    <a:pt x="6947385" y="1870022"/>
-                  </a:lnTo>
-                  <a:lnTo>
-                    <a:pt x="7019007" y="1877705"/>
-                  </a:lnTo>
-                  <a:lnTo>
-                    <a:pt x="7090630" y="1885262"/>
+                    <a:pt x="71622" y="42085"/>
+                  </a:lnTo>
+                  <a:lnTo>
+                    <a:pt x="143245" y="83449"/>
+                  </a:lnTo>
+                  <a:lnTo>
+                    <a:pt x="214867" y="124103"/>
+                  </a:lnTo>
+                  <a:lnTo>
+                    <a:pt x="286490" y="164059"/>
+                  </a:lnTo>
+                  <a:lnTo>
+                    <a:pt x="358112" y="203329"/>
+                  </a:lnTo>
+                  <a:lnTo>
+                    <a:pt x="429735" y="241925"/>
+                  </a:lnTo>
+                  <a:lnTo>
+                    <a:pt x="501357" y="279859"/>
+                  </a:lnTo>
+                  <a:lnTo>
+                    <a:pt x="572980" y="317142"/>
+                  </a:lnTo>
+                  <a:lnTo>
+                    <a:pt x="644602" y="353784"/>
+                  </a:lnTo>
+                  <a:lnTo>
+                    <a:pt x="716225" y="389798"/>
+                  </a:lnTo>
+                  <a:lnTo>
+                    <a:pt x="787847" y="425194"/>
+                  </a:lnTo>
+                  <a:lnTo>
+                    <a:pt x="859470" y="459982"/>
+                  </a:lnTo>
+                  <a:lnTo>
+                    <a:pt x="931092" y="494174"/>
+                  </a:lnTo>
+                  <a:lnTo>
+                    <a:pt x="1002715" y="527778"/>
+                  </a:lnTo>
+                  <a:lnTo>
+                    <a:pt x="1074337" y="560806"/>
+                  </a:lnTo>
+                  <a:lnTo>
+                    <a:pt x="1145960" y="593266"/>
+                  </a:lnTo>
+                  <a:lnTo>
+                    <a:pt x="1217582" y="625170"/>
+                  </a:lnTo>
+                  <a:lnTo>
+                    <a:pt x="1289205" y="656526"/>
+                  </a:lnTo>
+                  <a:lnTo>
+                    <a:pt x="1360827" y="687344"/>
+                  </a:lnTo>
+                  <a:lnTo>
+                    <a:pt x="1432450" y="717633"/>
+                  </a:lnTo>
+                  <a:lnTo>
+                    <a:pt x="1504073" y="747402"/>
+                  </a:lnTo>
+                  <a:lnTo>
+                    <a:pt x="1575695" y="776660"/>
+                  </a:lnTo>
+                  <a:lnTo>
+                    <a:pt x="1647318" y="805416"/>
+                  </a:lnTo>
+                  <a:lnTo>
+                    <a:pt x="1718940" y="833679"/>
+                  </a:lnTo>
+                  <a:lnTo>
+                    <a:pt x="1790563" y="861456"/>
+                  </a:lnTo>
+                  <a:lnTo>
+                    <a:pt x="1862185" y="888757"/>
+                  </a:lnTo>
+                  <a:lnTo>
+                    <a:pt x="1933808" y="915589"/>
+                  </a:lnTo>
+                  <a:lnTo>
+                    <a:pt x="2005430" y="941961"/>
+                  </a:lnTo>
+                  <a:lnTo>
+                    <a:pt x="2077053" y="967880"/>
+                  </a:lnTo>
+                  <a:lnTo>
+                    <a:pt x="2148675" y="993354"/>
+                  </a:lnTo>
+                  <a:lnTo>
+                    <a:pt x="2220298" y="1018391"/>
+                  </a:lnTo>
+                  <a:lnTo>
+                    <a:pt x="2291920" y="1042998"/>
+                  </a:lnTo>
+                  <a:lnTo>
+                    <a:pt x="2363543" y="1067183"/>
+                  </a:lnTo>
+                  <a:lnTo>
+                    <a:pt x="2435165" y="1090953"/>
+                  </a:lnTo>
+                  <a:lnTo>
+                    <a:pt x="2506788" y="1114314"/>
+                  </a:lnTo>
+                  <a:lnTo>
+                    <a:pt x="2578410" y="1137275"/>
+                  </a:lnTo>
+                  <a:lnTo>
+                    <a:pt x="2650033" y="1159842"/>
+                  </a:lnTo>
+                  <a:lnTo>
+                    <a:pt x="2721655" y="1182022"/>
+                  </a:lnTo>
+                  <a:lnTo>
+                    <a:pt x="2793278" y="1203820"/>
+                  </a:lnTo>
+                  <a:lnTo>
+                    <a:pt x="2864901" y="1225245"/>
+                  </a:lnTo>
+                  <a:lnTo>
+                    <a:pt x="2936523" y="1246302"/>
+                  </a:lnTo>
+                  <a:lnTo>
+                    <a:pt x="3008146" y="1266997"/>
+                  </a:lnTo>
+                  <a:lnTo>
+                    <a:pt x="3079768" y="1287338"/>
+                  </a:lnTo>
+                  <a:lnTo>
+                    <a:pt x="3151391" y="1307329"/>
+                  </a:lnTo>
+                  <a:lnTo>
+                    <a:pt x="3223013" y="1326977"/>
+                  </a:lnTo>
+                  <a:lnTo>
+                    <a:pt x="3294636" y="1346288"/>
+                  </a:lnTo>
+                  <a:lnTo>
+                    <a:pt x="3366258" y="1365268"/>
+                  </a:lnTo>
+                  <a:lnTo>
+                    <a:pt x="3437881" y="1383921"/>
+                  </a:lnTo>
+                  <a:lnTo>
+                    <a:pt x="3509503" y="1402255"/>
+                  </a:lnTo>
+                  <a:lnTo>
+                    <a:pt x="3581126" y="1420274"/>
+                  </a:lnTo>
+                  <a:lnTo>
+                    <a:pt x="3652748" y="1437983"/>
+                  </a:lnTo>
+                  <a:lnTo>
+                    <a:pt x="3724371" y="1455389"/>
+                  </a:lnTo>
+                  <a:lnTo>
+                    <a:pt x="3795993" y="1472496"/>
+                  </a:lnTo>
+                  <a:lnTo>
+                    <a:pt x="3867616" y="1489309"/>
+                  </a:lnTo>
+                  <a:lnTo>
+                    <a:pt x="3939238" y="1505834"/>
+                  </a:lnTo>
+                  <a:lnTo>
+                    <a:pt x="4010861" y="1522075"/>
+                  </a:lnTo>
+                  <a:lnTo>
+                    <a:pt x="4082483" y="1538038"/>
+                  </a:lnTo>
+                  <a:lnTo>
+                    <a:pt x="4154106" y="1553726"/>
+                  </a:lnTo>
+                  <a:lnTo>
+                    <a:pt x="4225729" y="1569145"/>
+                  </a:lnTo>
+                  <a:lnTo>
+                    <a:pt x="4297351" y="1584300"/>
+                  </a:lnTo>
+                  <a:lnTo>
+                    <a:pt x="4368974" y="1599194"/>
+                  </a:lnTo>
+                  <a:lnTo>
+                    <a:pt x="4440596" y="1613833"/>
+                  </a:lnTo>
+                  <a:lnTo>
+                    <a:pt x="4512219" y="1628221"/>
+                  </a:lnTo>
+                  <a:lnTo>
+                    <a:pt x="4583841" y="1642361"/>
+                  </a:lnTo>
+                  <a:lnTo>
+                    <a:pt x="4655464" y="1656259"/>
+                  </a:lnTo>
+                  <a:lnTo>
+                    <a:pt x="4727086" y="1669919"/>
+                  </a:lnTo>
+                  <a:lnTo>
+                    <a:pt x="4798709" y="1683344"/>
+                  </a:lnTo>
+                  <a:lnTo>
+                    <a:pt x="4870331" y="1696538"/>
+                  </a:lnTo>
+                  <a:lnTo>
+                    <a:pt x="4941954" y="1709506"/>
+                  </a:lnTo>
+                  <a:lnTo>
+                    <a:pt x="5013576" y="1722252"/>
+                  </a:lnTo>
+                  <a:lnTo>
+                    <a:pt x="5085199" y="1734779"/>
+                  </a:lnTo>
+                  <a:lnTo>
+                    <a:pt x="5156821" y="1747090"/>
+                  </a:lnTo>
+                  <a:lnTo>
+                    <a:pt x="5228444" y="1759191"/>
+                  </a:lnTo>
+                  <a:lnTo>
+                    <a:pt x="5300066" y="1771083"/>
+                  </a:lnTo>
+                  <a:lnTo>
+                    <a:pt x="5371689" y="1782772"/>
+                  </a:lnTo>
+                  <a:lnTo>
+                    <a:pt x="5443311" y="1794260"/>
+                  </a:lnTo>
+                  <a:lnTo>
+                    <a:pt x="5514934" y="1805551"/>
+                  </a:lnTo>
+                  <a:lnTo>
+                    <a:pt x="5586557" y="1816648"/>
+                  </a:lnTo>
+                  <a:lnTo>
+                    <a:pt x="5658179" y="1827555"/>
+                  </a:lnTo>
+                  <a:lnTo>
+                    <a:pt x="5729802" y="1838274"/>
+                  </a:lnTo>
+                  <a:lnTo>
+                    <a:pt x="5801424" y="1848810"/>
+                  </a:lnTo>
+                  <a:lnTo>
+                    <a:pt x="5873047" y="1859164"/>
+                  </a:lnTo>
+                  <a:lnTo>
+                    <a:pt x="5944669" y="1869341"/>
+                  </a:lnTo>
+                  <a:lnTo>
+                    <a:pt x="6016292" y="1879343"/>
+                  </a:lnTo>
+                  <a:lnTo>
+                    <a:pt x="6087914" y="1889174"/>
+                  </a:lnTo>
+                  <a:lnTo>
+                    <a:pt x="6159537" y="1898836"/>
+                  </a:lnTo>
+                  <a:lnTo>
+                    <a:pt x="6231159" y="1908332"/>
+                  </a:lnTo>
+                  <a:lnTo>
+                    <a:pt x="6302782" y="1917665"/>
+                  </a:lnTo>
+                  <a:lnTo>
+                    <a:pt x="6374404" y="1926838"/>
+                  </a:lnTo>
+                  <a:lnTo>
+                    <a:pt x="6446027" y="1935853"/>
+                  </a:lnTo>
+                  <a:lnTo>
+                    <a:pt x="6517649" y="1944714"/>
+                  </a:lnTo>
+                  <a:lnTo>
+                    <a:pt x="6589272" y="1953423"/>
+                  </a:lnTo>
+                  <a:lnTo>
+                    <a:pt x="6660894" y="1961982"/>
+                  </a:lnTo>
+                  <a:lnTo>
+                    <a:pt x="6732517" y="1970394"/>
+                  </a:lnTo>
+                  <a:lnTo>
+                    <a:pt x="6804139" y="1978662"/>
+                  </a:lnTo>
+                  <a:lnTo>
+                    <a:pt x="6875762" y="1986788"/>
+                  </a:lnTo>
+                  <a:lnTo>
+                    <a:pt x="6947385" y="1994774"/>
+                  </a:lnTo>
+                  <a:lnTo>
+                    <a:pt x="7019007" y="2002624"/>
+                  </a:lnTo>
+                  <a:lnTo>
+                    <a:pt x="7090630" y="2010339"/>
                   </a:lnTo>
                 </a:path>
               </a:pathLst>
@@ -4490,7 +4478,7 @@
           </p:nvSpPr>
           <p:spPr>
             <a:xfrm>
-              <a:off x="5636831" y="2073503"/>
+              <a:off x="5656410" y="2073503"/>
               <a:ext cx="0" cy="3649639"/>
             </a:xfrm>
             <a:custGeom>
@@ -4533,7 +4521,7 @@
           </p:nvSpPr>
           <p:spPr>
             <a:xfrm>
-              <a:off x="4328179" y="2073503"/>
+              <a:off x="4335733" y="2073503"/>
               <a:ext cx="0" cy="3649639"/>
             </a:xfrm>
             <a:custGeom>
@@ -4576,7 +4564,7 @@
           </p:nvSpPr>
           <p:spPr>
             <a:xfrm>
-              <a:off x="6683624" y="2073503"/>
+              <a:off x="6684598" y="2073503"/>
               <a:ext cx="0" cy="3649639"/>
             </a:xfrm>
             <a:custGeom>
@@ -4849,7 +4837,7 @@
           </p:nvSpPr>
           <p:spPr>
             <a:xfrm>
-              <a:off x="2970385" y="5785772"/>
+              <a:off x="2971977" y="5785772"/>
               <a:ext cx="161574" cy="80101"/>
             </a:xfrm>
             <a:prstGeom prst="rect">
@@ -4895,7 +4883,7 @@
           </p:nvSpPr>
           <p:spPr>
             <a:xfrm>
-              <a:off x="5501440" y="5785772"/>
+              <a:off x="5499574" y="5785772"/>
               <a:ext cx="62179" cy="80101"/>
             </a:xfrm>
             <a:prstGeom prst="rect">
@@ -4941,7 +4929,7 @@
           </p:nvSpPr>
           <p:spPr>
             <a:xfrm>
-              <a:off x="7951708" y="5785772"/>
+              <a:off x="7946384" y="5785772"/>
               <a:ext cx="124358" cy="80101"/>
             </a:xfrm>
             <a:prstGeom prst="rect">
@@ -5112,7 +5100,7 @@
                   <a:latin typeface="Helvetica"/>
                   <a:cs typeface="Helvetica"/>
                 </a:rPr>
-                <a:t>subHR per 10 mL/min decline: 1.26 (1.04-1.52), p_Bonf = 0.101 (n = 6)  |  per IQR decline (Δ = 23.7): 1.73 (1.10-2.70)  |  IQR: [-12.1, 11.6]</a:t>
+                <a:t>subHR per 10 mL/min decline: 1.27 (1.05-1.53), p_Bonf = 0.077 (n = 6)  |  per IQR decline (Δ = 23.7): 1.76 (1.13-2.76)  |  IQR: [-12.1, 11.6]</a:t>
               </a:r>
             </a:p>
           </p:txBody>
